--- a/examples/recreations/21_Dropbox_Religion__Rupnik_Saturno_Clericalism/out_mat2ppt.pptx
+++ b/examples/recreations/21_Dropbox_Religion__Rupnik_Saturno_Clericalism/out_mat2ppt.pptx
@@ -3088,6 +3088,69 @@
         <p:nvPr/>
       </p:nvGrpSpPr>
       <p:grpSpPr/>
+      <p:pic>
+        <p:nvPicPr>
+          <p:cNvPr id="2" name="Picture 1" descr="image1.png"/>
+          <p:cNvPicPr>
+            <a:picLocks noChangeAspect="1"/>
+          </p:cNvPicPr>
+          <p:nvPr/>
+        </p:nvPicPr>
+        <p:blipFill>
+          <a:blip r:embed="rId2"/>
+          <a:stretch>
+            <a:fillRect/>
+          </a:stretch>
+        </p:blipFill>
+        <p:spPr>
+          <a:xfrm>
+            <a:off x="0" y="436084"/>
+            <a:ext cx="12192000" cy="5449019"/>
+          </a:xfrm>
+          <a:prstGeom prst="rect">
+            <a:avLst/>
+          </a:prstGeom>
+        </p:spPr>
+      </p:pic>
+      <p:sp>
+        <p:nvSpPr>
+          <p:cNvPr id="3" name="Rectangle 2"/>
+          <p:cNvSpPr/>
+          <p:nvPr/>
+        </p:nvSpPr>
+        <p:spPr>
+          <a:xfrm>
+            <a:off x="602673" y="5885103"/>
+            <a:ext cx="10986654" cy="523220"/>
+          </a:xfrm>
+          <a:prstGeom prst="rect">
+            <a:avLst/>
+          </a:prstGeom>
+        </p:spPr>
+        <p:style>
+          <a:lnRef idx="1">
+            <a:schemeClr val="accent1"/>
+          </a:lnRef>
+          <a:fillRef idx="3">
+            <a:schemeClr val="accent1"/>
+          </a:fillRef>
+          <a:effectRef idx="2">
+            <a:schemeClr val="accent1"/>
+          </a:effectRef>
+          <a:fontRef idx="minor">
+            <a:schemeClr val="lt1"/>
+          </a:fontRef>
+        </p:style>
+        <p:txBody>
+          <a:bodyPr rtlCol="0" anchor="ctr"/>
+          <a:lstStyle/>
+          <a:p>
+            <a:r>
+              <a:t>One of these is a symbol of scandal and clericalism.  The other is a hat.</a:t>
+            </a:r>
+          </a:p>
+        </p:txBody>
+      </p:sp>
     </p:spTree>
   </p:cSld>
   <p:clrMapOvr>

--- a/examples/recreations/21_Dropbox_Religion__Rupnik_Saturno_Clericalism/out_mat2ppt.pptx
+++ b/examples/recreations/21_Dropbox_Religion__Rupnik_Saturno_Clericalism/out_mat2ppt.pptx
@@ -1,19 +1,19 @@
 
 <file path=ppt/presentation.xml><?xml version="1.0" encoding="utf-8"?>
-<p:presentation xmlns:a="http://schemas.openxmlformats.org/drawingml/2006/main" xmlns:r="http://schemas.openxmlformats.org/officeDocument/2006/relationships" xmlns:p="http://schemas.openxmlformats.org/presentationml/2006/main" saveSubsetFonts="1" autoCompressPictures="0">
+<p:presentation xmlns:a="http://schemas.openxmlformats.org/drawingml/2006/main" xmlns:r="http://schemas.openxmlformats.org/officeDocument/2006/relationships" xmlns:p="http://schemas.openxmlformats.org/presentationml/2006/main" saveSubsetFonts="1">
   <p:sldMasterIdLst>
     <p:sldMasterId id="2147483648" r:id="rId1"/>
   </p:sldMasterIdLst>
   <p:sldIdLst>
     <p:sldId id="256" r:id="rId7"/>
   </p:sldIdLst>
-  <p:sldSz cx="12192000" cy="6858000" type="screen4x3"/>
+  <p:sldSz cx="12192000" cy="6858000"/>
   <p:notesSz cx="6858000" cy="9144000"/>
   <p:defaultTextStyle>
     <a:defPPr>
       <a:defRPr lang="en-US"/>
     </a:defPPr>
-    <a:lvl1pPr marL="0" algn="l" defTabSz="457200" rtl="0" eaLnBrk="1" latinLnBrk="0" hangingPunct="1">
+    <a:lvl1pPr marL="0" algn="l" defTabSz="914400" rtl="0" eaLnBrk="1" latinLnBrk="0" hangingPunct="1">
       <a:defRPr sz="1800" kern="1200">
         <a:solidFill>
           <a:schemeClr val="tx1"/>
@@ -23,7 +23,7 @@
         <a:cs typeface="+mn-cs"/>
       </a:defRPr>
     </a:lvl1pPr>
-    <a:lvl2pPr marL="457200" algn="l" defTabSz="457200" rtl="0" eaLnBrk="1" latinLnBrk="0" hangingPunct="1">
+    <a:lvl2pPr marL="457200" algn="l" defTabSz="914400" rtl="0" eaLnBrk="1" latinLnBrk="0" hangingPunct="1">
       <a:defRPr sz="1800" kern="1200">
         <a:solidFill>
           <a:schemeClr val="tx1"/>
@@ -33,7 +33,7 @@
         <a:cs typeface="+mn-cs"/>
       </a:defRPr>
     </a:lvl2pPr>
-    <a:lvl3pPr marL="914400" algn="l" defTabSz="457200" rtl="0" eaLnBrk="1" latinLnBrk="0" hangingPunct="1">
+    <a:lvl3pPr marL="914400" algn="l" defTabSz="914400" rtl="0" eaLnBrk="1" latinLnBrk="0" hangingPunct="1">
       <a:defRPr sz="1800" kern="1200">
         <a:solidFill>
           <a:schemeClr val="tx1"/>
@@ -43,7 +43,7 @@
         <a:cs typeface="+mn-cs"/>
       </a:defRPr>
     </a:lvl3pPr>
-    <a:lvl4pPr marL="1371600" algn="l" defTabSz="457200" rtl="0" eaLnBrk="1" latinLnBrk="0" hangingPunct="1">
+    <a:lvl4pPr marL="1371600" algn="l" defTabSz="914400" rtl="0" eaLnBrk="1" latinLnBrk="0" hangingPunct="1">
       <a:defRPr sz="1800" kern="1200">
         <a:solidFill>
           <a:schemeClr val="tx1"/>
@@ -53,7 +53,7 @@
         <a:cs typeface="+mn-cs"/>
       </a:defRPr>
     </a:lvl4pPr>
-    <a:lvl5pPr marL="1828800" algn="l" defTabSz="457200" rtl="0" eaLnBrk="1" latinLnBrk="0" hangingPunct="1">
+    <a:lvl5pPr marL="1828800" algn="l" defTabSz="914400" rtl="0" eaLnBrk="1" latinLnBrk="0" hangingPunct="1">
       <a:defRPr sz="1800" kern="1200">
         <a:solidFill>
           <a:schemeClr val="tx1"/>
@@ -63,7 +63,7 @@
         <a:cs typeface="+mn-cs"/>
       </a:defRPr>
     </a:lvl5pPr>
-    <a:lvl6pPr marL="2286000" algn="l" defTabSz="457200" rtl="0" eaLnBrk="1" latinLnBrk="0" hangingPunct="1">
+    <a:lvl6pPr marL="2286000" algn="l" defTabSz="914400" rtl="0" eaLnBrk="1" latinLnBrk="0" hangingPunct="1">
       <a:defRPr sz="1800" kern="1200">
         <a:solidFill>
           <a:schemeClr val="tx1"/>
@@ -73,7 +73,7 @@
         <a:cs typeface="+mn-cs"/>
       </a:defRPr>
     </a:lvl6pPr>
-    <a:lvl7pPr marL="2743200" algn="l" defTabSz="457200" rtl="0" eaLnBrk="1" latinLnBrk="0" hangingPunct="1">
+    <a:lvl7pPr marL="2743200" algn="l" defTabSz="914400" rtl="0" eaLnBrk="1" latinLnBrk="0" hangingPunct="1">
       <a:defRPr sz="1800" kern="1200">
         <a:solidFill>
           <a:schemeClr val="tx1"/>
@@ -83,7 +83,7 @@
         <a:cs typeface="+mn-cs"/>
       </a:defRPr>
     </a:lvl7pPr>
-    <a:lvl8pPr marL="3200400" algn="l" defTabSz="457200" rtl="0" eaLnBrk="1" latinLnBrk="0" hangingPunct="1">
+    <a:lvl8pPr marL="3200400" algn="l" defTabSz="914400" rtl="0" eaLnBrk="1" latinLnBrk="0" hangingPunct="1">
       <a:defRPr sz="1800" kern="1200">
         <a:solidFill>
           <a:schemeClr val="tx1"/>
@@ -93,7 +93,7 @@
         <a:cs typeface="+mn-cs"/>
       </a:defRPr>
     </a:lvl8pPr>
-    <a:lvl9pPr marL="3657600" algn="l" defTabSz="457200" rtl="0" eaLnBrk="1" latinLnBrk="0" hangingPunct="1">
+    <a:lvl9pPr marL="3657600" algn="l" defTabSz="914400" rtl="0" eaLnBrk="1" latinLnBrk="0" hangingPunct="1">
       <a:defRPr sz="1800" kern="1200">
         <a:solidFill>
           <a:schemeClr val="tx1"/>
@@ -104,6 +104,22 @@
       </a:defRPr>
     </a:lvl9pPr>
   </p:defaultTextStyle>
+  <p:extLst>
+    <p:ext uri="{EFAFB233-063F-42B5-8137-9DF3F51BA10A}">
+      <p15:sldGuideLst xmlns:p15="http://schemas.microsoft.com/office/powerpoint/2012/main">
+        <p15:guide id="1" orient="horz" pos="2160" userDrawn="1">
+          <p15:clr>
+            <a:srgbClr val="A4A3A4"/>
+          </p15:clr>
+        </p15:guide>
+        <p15:guide id="2" pos="3840" userDrawn="1">
+          <p15:clr>
+            <a:srgbClr val="A4A3A4"/>
+          </p15:clr>
+        </p15:guide>
+      </p15:sldGuideLst>
+    </p:ext>
+  </p:extLst>
 </p:presentation>
 </file>
 
@@ -126,7 +142,13 @@
       </p:grpSpPr>
       <p:sp>
         <p:nvSpPr>
-          <p:cNvPr id="2" name="Title 1"/>
+          <p:cNvPr id="2" name="Title 1">
+            <a:extLst>
+              <a:ext uri="{FF2B5EF4-FFF2-40B4-BE49-F238E27FC236}">
+                <a16:creationId xmlns:a16="http://schemas.microsoft.com/office/drawing/2014/main" id="{3F9CF1E5-68B4-AD40-F5D2-D588E3495D6B}"/>
+              </a:ext>
+            </a:extLst>
+          </p:cNvPr>
           <p:cNvSpPr>
             <a:spLocks noGrp="1"/>
           </p:cNvSpPr>
@@ -136,25 +158,34 @@
         </p:nvSpPr>
         <p:spPr>
           <a:xfrm>
-            <a:off x="685800" y="2130425"/>
-            <a:ext cx="7772400" cy="1470025"/>
+            <a:off x="1524000" y="1122363"/>
+            <a:ext cx="9144000" cy="2387600"/>
           </a:xfrm>
         </p:spPr>
         <p:txBody>
-          <a:bodyPr/>
-          <a:lstStyle/>
-          <a:p>
-            <a:r>
-              <a:rPr lang="en-US" smtClean="0"/>
+          <a:bodyPr anchor="b"/>
+          <a:lstStyle>
+            <a:lvl1pPr algn="ctr">
+              <a:defRPr sz="6000"/>
+            </a:lvl1pPr>
+          </a:lstStyle>
+          <a:p>
+            <a:r>
+              <a:rPr lang="en-US"/>
               <a:t>Click to edit Master title style</a:t>
             </a:r>
-            <a:endParaRPr lang="en-US"/>
-          </a:p>
-        </p:txBody>
-      </p:sp>
-      <p:sp>
-        <p:nvSpPr>
-          <p:cNvPr id="3" name="Subtitle 2"/>
+          </a:p>
+        </p:txBody>
+      </p:sp>
+      <p:sp>
+        <p:nvSpPr>
+          <p:cNvPr id="3" name="Subtitle 2">
+            <a:extLst>
+              <a:ext uri="{FF2B5EF4-FFF2-40B4-BE49-F238E27FC236}">
+                <a16:creationId xmlns:a16="http://schemas.microsoft.com/office/drawing/2014/main" id="{40A16E72-659C-A9CD-08B6-83FB854951C9}"/>
+              </a:ext>
+            </a:extLst>
+          </p:cNvPr>
           <p:cNvSpPr>
             <a:spLocks noGrp="1"/>
           </p:cNvSpPr>
@@ -164,8 +195,8 @@
         </p:nvSpPr>
         <p:spPr>
           <a:xfrm>
-            <a:off x="1371600" y="3886200"/>
-            <a:ext cx="6400800" cy="1752600"/>
+            <a:off x="1524000" y="3602038"/>
+            <a:ext cx="9144000" cy="1655762"/>
           </a:xfrm>
         </p:spPr>
         <p:txBody>
@@ -173,122 +204,73 @@
           <a:lstStyle>
             <a:lvl1pPr marL="0" indent="0" algn="ctr">
               <a:buNone/>
-              <a:defRPr>
-                <a:solidFill>
-                  <a:schemeClr val="tx1">
-                    <a:tint val="75000"/>
-                  </a:schemeClr>
-                </a:solidFill>
-              </a:defRPr>
+              <a:defRPr sz="2400"/>
             </a:lvl1pPr>
             <a:lvl2pPr marL="457200" indent="0" algn="ctr">
               <a:buNone/>
-              <a:defRPr>
-                <a:solidFill>
-                  <a:schemeClr val="tx1">
-                    <a:tint val="75000"/>
-                  </a:schemeClr>
-                </a:solidFill>
-              </a:defRPr>
+              <a:defRPr sz="2000"/>
             </a:lvl2pPr>
             <a:lvl3pPr marL="914400" indent="0" algn="ctr">
               <a:buNone/>
-              <a:defRPr>
-                <a:solidFill>
-                  <a:schemeClr val="tx1">
-                    <a:tint val="75000"/>
-                  </a:schemeClr>
-                </a:solidFill>
-              </a:defRPr>
+              <a:defRPr sz="1800"/>
             </a:lvl3pPr>
             <a:lvl4pPr marL="1371600" indent="0" algn="ctr">
               <a:buNone/>
-              <a:defRPr>
-                <a:solidFill>
-                  <a:schemeClr val="tx1">
-                    <a:tint val="75000"/>
-                  </a:schemeClr>
-                </a:solidFill>
-              </a:defRPr>
+              <a:defRPr sz="1600"/>
             </a:lvl4pPr>
             <a:lvl5pPr marL="1828800" indent="0" algn="ctr">
               <a:buNone/>
-              <a:defRPr>
-                <a:solidFill>
-                  <a:schemeClr val="tx1">
-                    <a:tint val="75000"/>
-                  </a:schemeClr>
-                </a:solidFill>
-              </a:defRPr>
+              <a:defRPr sz="1600"/>
             </a:lvl5pPr>
             <a:lvl6pPr marL="2286000" indent="0" algn="ctr">
               <a:buNone/>
-              <a:defRPr>
-                <a:solidFill>
-                  <a:schemeClr val="tx1">
-                    <a:tint val="75000"/>
-                  </a:schemeClr>
-                </a:solidFill>
-              </a:defRPr>
+              <a:defRPr sz="1600"/>
             </a:lvl6pPr>
             <a:lvl7pPr marL="2743200" indent="0" algn="ctr">
               <a:buNone/>
-              <a:defRPr>
-                <a:solidFill>
-                  <a:schemeClr val="tx1">
-                    <a:tint val="75000"/>
-                  </a:schemeClr>
-                </a:solidFill>
-              </a:defRPr>
+              <a:defRPr sz="1600"/>
             </a:lvl7pPr>
             <a:lvl8pPr marL="3200400" indent="0" algn="ctr">
               <a:buNone/>
-              <a:defRPr>
-                <a:solidFill>
-                  <a:schemeClr val="tx1">
-                    <a:tint val="75000"/>
-                  </a:schemeClr>
-                </a:solidFill>
-              </a:defRPr>
+              <a:defRPr sz="1600"/>
             </a:lvl8pPr>
             <a:lvl9pPr marL="3657600" indent="0" algn="ctr">
               <a:buNone/>
-              <a:defRPr>
-                <a:solidFill>
-                  <a:schemeClr val="tx1">
-                    <a:tint val="75000"/>
-                  </a:schemeClr>
-                </a:solidFill>
-              </a:defRPr>
+              <a:defRPr sz="1600"/>
             </a:lvl9pPr>
           </a:lstStyle>
           <a:p>
             <a:r>
+              <a:rPr lang="en-US"/>
+              <a:t>Click to edit Master subtitle style</a:t>
+            </a:r>
+          </a:p>
+        </p:txBody>
+      </p:sp>
+      <p:sp>
+        <p:nvSpPr>
+          <p:cNvPr id="4" name="Date Placeholder 3">
+            <a:extLst>
+              <a:ext uri="{FF2B5EF4-FFF2-40B4-BE49-F238E27FC236}">
+                <a16:creationId xmlns:a16="http://schemas.microsoft.com/office/drawing/2014/main" id="{3BD36810-E0A5-DC15-B25C-0A6F29D76285}"/>
+              </a:ext>
+            </a:extLst>
+          </p:cNvPr>
+          <p:cNvSpPr>
+            <a:spLocks noGrp="1"/>
+          </p:cNvSpPr>
+          <p:nvPr>
+            <p:ph type="dt" sz="half" idx="10"/>
+          </p:nvPr>
+        </p:nvSpPr>
+        <p:spPr/>
+        <p:txBody>
+          <a:bodyPr/>
+          <a:lstStyle/>
+          <a:p>
+            <a:fld id="{DE25E60F-0558-4F08-8A9F-A8C7708DFBAC}" type="datetimeFigureOut">
               <a:rPr lang="en-US" smtClean="0"/>
-              <a:t>Click to edit Master subtitle style</a:t>
-            </a:r>
-            <a:endParaRPr lang="en-US"/>
-          </a:p>
-        </p:txBody>
-      </p:sp>
-      <p:sp>
-        <p:nvSpPr>
-          <p:cNvPr id="4" name="Date Placeholder 3"/>
-          <p:cNvSpPr>
-            <a:spLocks noGrp="1"/>
-          </p:cNvSpPr>
-          <p:nvPr>
-            <p:ph type="dt" sz="half" idx="10"/>
-          </p:nvPr>
-        </p:nvSpPr>
-        <p:spPr/>
-        <p:txBody>
-          <a:bodyPr/>
-          <a:lstStyle/>
-          <a:p>
-            <a:fld id="{5BCAD085-E8A6-8845-BD4E-CB4CCA059FC4}" type="datetimeFigureOut">
-              <a:rPr lang="en-US" smtClean="0"/>
-              <a:t>1/27/13</a:t>
+              <a:t>10/30/2023</a:t>
             </a:fld>
             <a:endParaRPr lang="en-US"/>
           </a:p>
@@ -296,7 +278,13 @@
       </p:sp>
       <p:sp>
         <p:nvSpPr>
-          <p:cNvPr id="5" name="Footer Placeholder 4"/>
+          <p:cNvPr id="5" name="Footer Placeholder 4">
+            <a:extLst>
+              <a:ext uri="{FF2B5EF4-FFF2-40B4-BE49-F238E27FC236}">
+                <a16:creationId xmlns:a16="http://schemas.microsoft.com/office/drawing/2014/main" id="{0D86C765-34AE-3B3C-9A20-B8D594420DF0}"/>
+              </a:ext>
+            </a:extLst>
+          </p:cNvPr>
           <p:cNvSpPr>
             <a:spLocks noGrp="1"/>
           </p:cNvSpPr>
@@ -315,7 +303,13 @@
       </p:sp>
       <p:sp>
         <p:nvSpPr>
-          <p:cNvPr id="6" name="Slide Number Placeholder 5"/>
+          <p:cNvPr id="6" name="Slide Number Placeholder 5">
+            <a:extLst>
+              <a:ext uri="{FF2B5EF4-FFF2-40B4-BE49-F238E27FC236}">
+                <a16:creationId xmlns:a16="http://schemas.microsoft.com/office/drawing/2014/main" id="{0549B0A9-2157-4ED5-41A6-C56CFE38AE1A}"/>
+              </a:ext>
+            </a:extLst>
+          </p:cNvPr>
           <p:cNvSpPr>
             <a:spLocks noGrp="1"/>
           </p:cNvSpPr>
@@ -328,7 +322,7 @@
           <a:bodyPr/>
           <a:lstStyle/>
           <a:p>
-            <a:fld id="{C1FF6DA9-008F-8B48-92A6-B652298478BF}" type="slidenum">
+            <a:fld id="{39D2B1DD-CD0E-4D8F-8F2D-CD486A006DF6}" type="slidenum">
               <a:rPr lang="en-US" smtClean="0"/>
               <a:t>‹#›</a:t>
             </a:fld>
@@ -339,7 +333,7 @@
     </p:spTree>
     <p:extLst>
       <p:ext uri="{BB962C8B-B14F-4D97-AF65-F5344CB8AC3E}">
-        <p14:creationId xmlns:p14="http://schemas.microsoft.com/office/powerpoint/2010/main" val="3168075583"/>
+        <p14:creationId xmlns:p14="http://schemas.microsoft.com/office/powerpoint/2010/main" val="1130381668"/>
       </p:ext>
     </p:extLst>
   </p:cSld>
@@ -368,7 +362,13 @@
       </p:grpSpPr>
       <p:sp>
         <p:nvSpPr>
-          <p:cNvPr id="2" name="Title 1"/>
+          <p:cNvPr id="2" name="Title 1">
+            <a:extLst>
+              <a:ext uri="{FF2B5EF4-FFF2-40B4-BE49-F238E27FC236}">
+                <a16:creationId xmlns:a16="http://schemas.microsoft.com/office/drawing/2014/main" id="{215851F0-A2FA-01BA-5141-6064D1DBDFDF}"/>
+              </a:ext>
+            </a:extLst>
+          </p:cNvPr>
           <p:cNvSpPr>
             <a:spLocks noGrp="1"/>
           </p:cNvSpPr>
@@ -382,83 +382,93 @@
           <a:lstStyle/>
           <a:p>
             <a:r>
+              <a:rPr lang="en-US"/>
+              <a:t>Click to edit Master title style</a:t>
+            </a:r>
+          </a:p>
+        </p:txBody>
+      </p:sp>
+      <p:sp>
+        <p:nvSpPr>
+          <p:cNvPr id="3" name="Vertical Text Placeholder 2">
+            <a:extLst>
+              <a:ext uri="{FF2B5EF4-FFF2-40B4-BE49-F238E27FC236}">
+                <a16:creationId xmlns:a16="http://schemas.microsoft.com/office/drawing/2014/main" id="{8E5FE385-90E2-F519-4252-CE346C4AD31A}"/>
+              </a:ext>
+            </a:extLst>
+          </p:cNvPr>
+          <p:cNvSpPr>
+            <a:spLocks noGrp="1"/>
+          </p:cNvSpPr>
+          <p:nvPr>
+            <p:ph type="body" orient="vert" idx="1"/>
+          </p:nvPr>
+        </p:nvSpPr>
+        <p:spPr/>
+        <p:txBody>
+          <a:bodyPr vert="eaVert"/>
+          <a:lstStyle/>
+          <a:p>
+            <a:pPr lvl="0"/>
+            <a:r>
+              <a:rPr lang="en-US"/>
+              <a:t>Click to edit Master text styles</a:t>
+            </a:r>
+          </a:p>
+          <a:p>
+            <a:pPr lvl="1"/>
+            <a:r>
+              <a:rPr lang="en-US"/>
+              <a:t>Second level</a:t>
+            </a:r>
+          </a:p>
+          <a:p>
+            <a:pPr lvl="2"/>
+            <a:r>
+              <a:rPr lang="en-US"/>
+              <a:t>Third level</a:t>
+            </a:r>
+          </a:p>
+          <a:p>
+            <a:pPr lvl="3"/>
+            <a:r>
+              <a:rPr lang="en-US"/>
+              <a:t>Fourth level</a:t>
+            </a:r>
+          </a:p>
+          <a:p>
+            <a:pPr lvl="4"/>
+            <a:r>
+              <a:rPr lang="en-US"/>
+              <a:t>Fifth level</a:t>
+            </a:r>
+          </a:p>
+        </p:txBody>
+      </p:sp>
+      <p:sp>
+        <p:nvSpPr>
+          <p:cNvPr id="4" name="Date Placeholder 3">
+            <a:extLst>
+              <a:ext uri="{FF2B5EF4-FFF2-40B4-BE49-F238E27FC236}">
+                <a16:creationId xmlns:a16="http://schemas.microsoft.com/office/drawing/2014/main" id="{3BED293E-938D-DE2C-06CD-26A65876E599}"/>
+              </a:ext>
+            </a:extLst>
+          </p:cNvPr>
+          <p:cNvSpPr>
+            <a:spLocks noGrp="1"/>
+          </p:cNvSpPr>
+          <p:nvPr>
+            <p:ph type="dt" sz="half" idx="10"/>
+          </p:nvPr>
+        </p:nvSpPr>
+        <p:spPr/>
+        <p:txBody>
+          <a:bodyPr/>
+          <a:lstStyle/>
+          <a:p>
+            <a:fld id="{DE25E60F-0558-4F08-8A9F-A8C7708DFBAC}" type="datetimeFigureOut">
               <a:rPr lang="en-US" smtClean="0"/>
-              <a:t>Click to edit Master title style</a:t>
-            </a:r>
-            <a:endParaRPr lang="en-US"/>
-          </a:p>
-        </p:txBody>
-      </p:sp>
-      <p:sp>
-        <p:nvSpPr>
-          <p:cNvPr id="3" name="Vertical Text Placeholder 2"/>
-          <p:cNvSpPr>
-            <a:spLocks noGrp="1"/>
-          </p:cNvSpPr>
-          <p:nvPr>
-            <p:ph type="body" orient="vert" idx="1"/>
-          </p:nvPr>
-        </p:nvSpPr>
-        <p:spPr/>
-        <p:txBody>
-          <a:bodyPr vert="eaVert"/>
-          <a:lstStyle/>
-          <a:p>
-            <a:pPr lvl="0"/>
-            <a:r>
-              <a:rPr lang="en-US" smtClean="0"/>
-              <a:t>Click to edit Master text styles</a:t>
-            </a:r>
-          </a:p>
-          <a:p>
-            <a:pPr lvl="1"/>
-            <a:r>
-              <a:rPr lang="en-US" smtClean="0"/>
-              <a:t>Second level</a:t>
-            </a:r>
-          </a:p>
-          <a:p>
-            <a:pPr lvl="2"/>
-            <a:r>
-              <a:rPr lang="en-US" smtClean="0"/>
-              <a:t>Third level</a:t>
-            </a:r>
-          </a:p>
-          <a:p>
-            <a:pPr lvl="3"/>
-            <a:r>
-              <a:rPr lang="en-US" smtClean="0"/>
-              <a:t>Fourth level</a:t>
-            </a:r>
-          </a:p>
-          <a:p>
-            <a:pPr lvl="4"/>
-            <a:r>
-              <a:rPr lang="en-US" smtClean="0"/>
-              <a:t>Fifth level</a:t>
-            </a:r>
-            <a:endParaRPr lang="en-US"/>
-          </a:p>
-        </p:txBody>
-      </p:sp>
-      <p:sp>
-        <p:nvSpPr>
-          <p:cNvPr id="4" name="Date Placeholder 3"/>
-          <p:cNvSpPr>
-            <a:spLocks noGrp="1"/>
-          </p:cNvSpPr>
-          <p:nvPr>
-            <p:ph type="dt" sz="half" idx="10"/>
-          </p:nvPr>
-        </p:nvSpPr>
-        <p:spPr/>
-        <p:txBody>
-          <a:bodyPr/>
-          <a:lstStyle/>
-          <a:p>
-            <a:fld id="{5BCAD085-E8A6-8845-BD4E-CB4CCA059FC4}" type="datetimeFigureOut">
-              <a:rPr lang="en-US" smtClean="0"/>
-              <a:t>1/27/13</a:t>
+              <a:t>10/30/2023</a:t>
             </a:fld>
             <a:endParaRPr lang="en-US"/>
           </a:p>
@@ -466,7 +476,13 @@
       </p:sp>
       <p:sp>
         <p:nvSpPr>
-          <p:cNvPr id="5" name="Footer Placeholder 4"/>
+          <p:cNvPr id="5" name="Footer Placeholder 4">
+            <a:extLst>
+              <a:ext uri="{FF2B5EF4-FFF2-40B4-BE49-F238E27FC236}">
+                <a16:creationId xmlns:a16="http://schemas.microsoft.com/office/drawing/2014/main" id="{F1275A13-DDFF-B0F5-0D40-80293D3033C8}"/>
+              </a:ext>
+            </a:extLst>
+          </p:cNvPr>
           <p:cNvSpPr>
             <a:spLocks noGrp="1"/>
           </p:cNvSpPr>
@@ -485,7 +501,13 @@
       </p:sp>
       <p:sp>
         <p:nvSpPr>
-          <p:cNvPr id="6" name="Slide Number Placeholder 5"/>
+          <p:cNvPr id="6" name="Slide Number Placeholder 5">
+            <a:extLst>
+              <a:ext uri="{FF2B5EF4-FFF2-40B4-BE49-F238E27FC236}">
+                <a16:creationId xmlns:a16="http://schemas.microsoft.com/office/drawing/2014/main" id="{9A049AE5-7839-D990-8FF8-6F696C039B17}"/>
+              </a:ext>
+            </a:extLst>
+          </p:cNvPr>
           <p:cNvSpPr>
             <a:spLocks noGrp="1"/>
           </p:cNvSpPr>
@@ -498,7 +520,7 @@
           <a:bodyPr/>
           <a:lstStyle/>
           <a:p>
-            <a:fld id="{C1FF6DA9-008F-8B48-92A6-B652298478BF}" type="slidenum">
+            <a:fld id="{39D2B1DD-CD0E-4D8F-8F2D-CD486A006DF6}" type="slidenum">
               <a:rPr lang="en-US" smtClean="0"/>
               <a:t>‹#›</a:t>
             </a:fld>
@@ -509,7 +531,7 @@
     </p:spTree>
     <p:extLst>
       <p:ext uri="{BB962C8B-B14F-4D97-AF65-F5344CB8AC3E}">
-        <p14:creationId xmlns:p14="http://schemas.microsoft.com/office/powerpoint/2010/main" val="2910927964"/>
+        <p14:creationId xmlns:p14="http://schemas.microsoft.com/office/powerpoint/2010/main" val="3299322147"/>
       </p:ext>
     </p:extLst>
   </p:cSld>
@@ -538,7 +560,13 @@
       </p:grpSpPr>
       <p:sp>
         <p:nvSpPr>
-          <p:cNvPr id="2" name="Vertical Title 1"/>
+          <p:cNvPr id="2" name="Vertical Title 1">
+            <a:extLst>
+              <a:ext uri="{FF2B5EF4-FFF2-40B4-BE49-F238E27FC236}">
+                <a16:creationId xmlns:a16="http://schemas.microsoft.com/office/drawing/2014/main" id="{E519F1D9-CC9F-01DC-6EEE-AF9E455C07A1}"/>
+              </a:ext>
+            </a:extLst>
+          </p:cNvPr>
           <p:cNvSpPr>
             <a:spLocks noGrp="1"/>
           </p:cNvSpPr>
@@ -548,8 +576,8 @@
         </p:nvSpPr>
         <p:spPr>
           <a:xfrm>
-            <a:off x="6629400" y="274638"/>
-            <a:ext cx="2057400" cy="5851525"/>
+            <a:off x="8724900" y="365125"/>
+            <a:ext cx="2628900" cy="5811838"/>
           </a:xfrm>
         </p:spPr>
         <p:txBody>
@@ -557,16 +585,21 @@
           <a:lstStyle/>
           <a:p>
             <a:r>
-              <a:rPr lang="en-US" smtClean="0"/>
+              <a:rPr lang="en-US"/>
               <a:t>Click to edit Master title style</a:t>
             </a:r>
-            <a:endParaRPr lang="en-US"/>
-          </a:p>
-        </p:txBody>
-      </p:sp>
-      <p:sp>
-        <p:nvSpPr>
-          <p:cNvPr id="3" name="Vertical Text Placeholder 2"/>
+          </a:p>
+        </p:txBody>
+      </p:sp>
+      <p:sp>
+        <p:nvSpPr>
+          <p:cNvPr id="3" name="Vertical Text Placeholder 2">
+            <a:extLst>
+              <a:ext uri="{FF2B5EF4-FFF2-40B4-BE49-F238E27FC236}">
+                <a16:creationId xmlns:a16="http://schemas.microsoft.com/office/drawing/2014/main" id="{E4ACBA38-8D4F-542E-BE60-0D89BAA165CA}"/>
+              </a:ext>
+            </a:extLst>
+          </p:cNvPr>
           <p:cNvSpPr>
             <a:spLocks noGrp="1"/>
           </p:cNvSpPr>
@@ -576,8 +609,8 @@
         </p:nvSpPr>
         <p:spPr>
           <a:xfrm>
-            <a:off x="457200" y="274638"/>
-            <a:ext cx="6019800" cy="5851525"/>
+            <a:off x="838200" y="365125"/>
+            <a:ext cx="7734300" cy="5811838"/>
           </a:xfrm>
         </p:spPr>
         <p:txBody>
@@ -586,59 +619,64 @@
           <a:p>
             <a:pPr lvl="0"/>
             <a:r>
+              <a:rPr lang="en-US"/>
+              <a:t>Click to edit Master text styles</a:t>
+            </a:r>
+          </a:p>
+          <a:p>
+            <a:pPr lvl="1"/>
+            <a:r>
+              <a:rPr lang="en-US"/>
+              <a:t>Second level</a:t>
+            </a:r>
+          </a:p>
+          <a:p>
+            <a:pPr lvl="2"/>
+            <a:r>
+              <a:rPr lang="en-US"/>
+              <a:t>Third level</a:t>
+            </a:r>
+          </a:p>
+          <a:p>
+            <a:pPr lvl="3"/>
+            <a:r>
+              <a:rPr lang="en-US"/>
+              <a:t>Fourth level</a:t>
+            </a:r>
+          </a:p>
+          <a:p>
+            <a:pPr lvl="4"/>
+            <a:r>
+              <a:rPr lang="en-US"/>
+              <a:t>Fifth level</a:t>
+            </a:r>
+          </a:p>
+        </p:txBody>
+      </p:sp>
+      <p:sp>
+        <p:nvSpPr>
+          <p:cNvPr id="4" name="Date Placeholder 3">
+            <a:extLst>
+              <a:ext uri="{FF2B5EF4-FFF2-40B4-BE49-F238E27FC236}">
+                <a16:creationId xmlns:a16="http://schemas.microsoft.com/office/drawing/2014/main" id="{D21EACDB-2DBB-9AA2-A911-D030471AD1A4}"/>
+              </a:ext>
+            </a:extLst>
+          </p:cNvPr>
+          <p:cNvSpPr>
+            <a:spLocks noGrp="1"/>
+          </p:cNvSpPr>
+          <p:nvPr>
+            <p:ph type="dt" sz="half" idx="10"/>
+          </p:nvPr>
+        </p:nvSpPr>
+        <p:spPr/>
+        <p:txBody>
+          <a:bodyPr/>
+          <a:lstStyle/>
+          <a:p>
+            <a:fld id="{DE25E60F-0558-4F08-8A9F-A8C7708DFBAC}" type="datetimeFigureOut">
               <a:rPr lang="en-US" smtClean="0"/>
-              <a:t>Click to edit Master text styles</a:t>
-            </a:r>
-          </a:p>
-          <a:p>
-            <a:pPr lvl="1"/>
-            <a:r>
-              <a:rPr lang="en-US" smtClean="0"/>
-              <a:t>Second level</a:t>
-            </a:r>
-          </a:p>
-          <a:p>
-            <a:pPr lvl="2"/>
-            <a:r>
-              <a:rPr lang="en-US" smtClean="0"/>
-              <a:t>Third level</a:t>
-            </a:r>
-          </a:p>
-          <a:p>
-            <a:pPr lvl="3"/>
-            <a:r>
-              <a:rPr lang="en-US" smtClean="0"/>
-              <a:t>Fourth level</a:t>
-            </a:r>
-          </a:p>
-          <a:p>
-            <a:pPr lvl="4"/>
-            <a:r>
-              <a:rPr lang="en-US" smtClean="0"/>
-              <a:t>Fifth level</a:t>
-            </a:r>
-            <a:endParaRPr lang="en-US"/>
-          </a:p>
-        </p:txBody>
-      </p:sp>
-      <p:sp>
-        <p:nvSpPr>
-          <p:cNvPr id="4" name="Date Placeholder 3"/>
-          <p:cNvSpPr>
-            <a:spLocks noGrp="1"/>
-          </p:cNvSpPr>
-          <p:nvPr>
-            <p:ph type="dt" sz="half" idx="10"/>
-          </p:nvPr>
-        </p:nvSpPr>
-        <p:spPr/>
-        <p:txBody>
-          <a:bodyPr/>
-          <a:lstStyle/>
-          <a:p>
-            <a:fld id="{5BCAD085-E8A6-8845-BD4E-CB4CCA059FC4}" type="datetimeFigureOut">
-              <a:rPr lang="en-US" smtClean="0"/>
-              <a:t>1/27/13</a:t>
+              <a:t>10/30/2023</a:t>
             </a:fld>
             <a:endParaRPr lang="en-US"/>
           </a:p>
@@ -646,7 +684,13 @@
       </p:sp>
       <p:sp>
         <p:nvSpPr>
-          <p:cNvPr id="5" name="Footer Placeholder 4"/>
+          <p:cNvPr id="5" name="Footer Placeholder 4">
+            <a:extLst>
+              <a:ext uri="{FF2B5EF4-FFF2-40B4-BE49-F238E27FC236}">
+                <a16:creationId xmlns:a16="http://schemas.microsoft.com/office/drawing/2014/main" id="{C1DECB9D-576B-7813-6D6F-34708712336D}"/>
+              </a:ext>
+            </a:extLst>
+          </p:cNvPr>
           <p:cNvSpPr>
             <a:spLocks noGrp="1"/>
           </p:cNvSpPr>
@@ -665,7 +709,13 @@
       </p:sp>
       <p:sp>
         <p:nvSpPr>
-          <p:cNvPr id="6" name="Slide Number Placeholder 5"/>
+          <p:cNvPr id="6" name="Slide Number Placeholder 5">
+            <a:extLst>
+              <a:ext uri="{FF2B5EF4-FFF2-40B4-BE49-F238E27FC236}">
+                <a16:creationId xmlns:a16="http://schemas.microsoft.com/office/drawing/2014/main" id="{385E46D2-B9CD-9E80-5D73-05979C47946E}"/>
+              </a:ext>
+            </a:extLst>
+          </p:cNvPr>
           <p:cNvSpPr>
             <a:spLocks noGrp="1"/>
           </p:cNvSpPr>
@@ -678,7 +728,7 @@
           <a:bodyPr/>
           <a:lstStyle/>
           <a:p>
-            <a:fld id="{C1FF6DA9-008F-8B48-92A6-B652298478BF}" type="slidenum">
+            <a:fld id="{39D2B1DD-CD0E-4D8F-8F2D-CD486A006DF6}" type="slidenum">
               <a:rPr lang="en-US" smtClean="0"/>
               <a:t>‹#›</a:t>
             </a:fld>
@@ -689,7 +739,7 @@
     </p:spTree>
     <p:extLst>
       <p:ext uri="{BB962C8B-B14F-4D97-AF65-F5344CB8AC3E}">
-        <p14:creationId xmlns:p14="http://schemas.microsoft.com/office/powerpoint/2010/main" val="3612223792"/>
+        <p14:creationId xmlns:p14="http://schemas.microsoft.com/office/powerpoint/2010/main" val="686160758"/>
       </p:ext>
     </p:extLst>
   </p:cSld>
@@ -718,7 +768,13 @@
       </p:grpSpPr>
       <p:sp>
         <p:nvSpPr>
-          <p:cNvPr id="2" name="Title 1"/>
+          <p:cNvPr id="2" name="Title 1">
+            <a:extLst>
+              <a:ext uri="{FF2B5EF4-FFF2-40B4-BE49-F238E27FC236}">
+                <a16:creationId xmlns:a16="http://schemas.microsoft.com/office/drawing/2014/main" id="{0F2ADBC7-54DE-5498-8E77-799EEEC4D02E}"/>
+              </a:ext>
+            </a:extLst>
+          </p:cNvPr>
           <p:cNvSpPr>
             <a:spLocks noGrp="1"/>
           </p:cNvSpPr>
@@ -732,83 +788,93 @@
           <a:lstStyle/>
           <a:p>
             <a:r>
+              <a:rPr lang="en-US"/>
+              <a:t>Click to edit Master title style</a:t>
+            </a:r>
+          </a:p>
+        </p:txBody>
+      </p:sp>
+      <p:sp>
+        <p:nvSpPr>
+          <p:cNvPr id="3" name="Content Placeholder 2">
+            <a:extLst>
+              <a:ext uri="{FF2B5EF4-FFF2-40B4-BE49-F238E27FC236}">
+                <a16:creationId xmlns:a16="http://schemas.microsoft.com/office/drawing/2014/main" id="{048D2890-5D4D-390B-CC49-5D0DD28F5D9D}"/>
+              </a:ext>
+            </a:extLst>
+          </p:cNvPr>
+          <p:cNvSpPr>
+            <a:spLocks noGrp="1"/>
+          </p:cNvSpPr>
+          <p:nvPr>
+            <p:ph idx="1"/>
+          </p:nvPr>
+        </p:nvSpPr>
+        <p:spPr/>
+        <p:txBody>
+          <a:bodyPr/>
+          <a:lstStyle/>
+          <a:p>
+            <a:pPr lvl="0"/>
+            <a:r>
+              <a:rPr lang="en-US"/>
+              <a:t>Click to edit Master text styles</a:t>
+            </a:r>
+          </a:p>
+          <a:p>
+            <a:pPr lvl="1"/>
+            <a:r>
+              <a:rPr lang="en-US"/>
+              <a:t>Second level</a:t>
+            </a:r>
+          </a:p>
+          <a:p>
+            <a:pPr lvl="2"/>
+            <a:r>
+              <a:rPr lang="en-US"/>
+              <a:t>Third level</a:t>
+            </a:r>
+          </a:p>
+          <a:p>
+            <a:pPr lvl="3"/>
+            <a:r>
+              <a:rPr lang="en-US"/>
+              <a:t>Fourth level</a:t>
+            </a:r>
+          </a:p>
+          <a:p>
+            <a:pPr lvl="4"/>
+            <a:r>
+              <a:rPr lang="en-US"/>
+              <a:t>Fifth level</a:t>
+            </a:r>
+          </a:p>
+        </p:txBody>
+      </p:sp>
+      <p:sp>
+        <p:nvSpPr>
+          <p:cNvPr id="4" name="Date Placeholder 3">
+            <a:extLst>
+              <a:ext uri="{FF2B5EF4-FFF2-40B4-BE49-F238E27FC236}">
+                <a16:creationId xmlns:a16="http://schemas.microsoft.com/office/drawing/2014/main" id="{268B10EF-FBE4-3C16-61EA-5A5905A019DD}"/>
+              </a:ext>
+            </a:extLst>
+          </p:cNvPr>
+          <p:cNvSpPr>
+            <a:spLocks noGrp="1"/>
+          </p:cNvSpPr>
+          <p:nvPr>
+            <p:ph type="dt" sz="half" idx="10"/>
+          </p:nvPr>
+        </p:nvSpPr>
+        <p:spPr/>
+        <p:txBody>
+          <a:bodyPr/>
+          <a:lstStyle/>
+          <a:p>
+            <a:fld id="{DE25E60F-0558-4F08-8A9F-A8C7708DFBAC}" type="datetimeFigureOut">
               <a:rPr lang="en-US" smtClean="0"/>
-              <a:t>Click to edit Master title style</a:t>
-            </a:r>
-            <a:endParaRPr lang="en-US"/>
-          </a:p>
-        </p:txBody>
-      </p:sp>
-      <p:sp>
-        <p:nvSpPr>
-          <p:cNvPr id="3" name="Content Placeholder 2"/>
-          <p:cNvSpPr>
-            <a:spLocks noGrp="1"/>
-          </p:cNvSpPr>
-          <p:nvPr>
-            <p:ph idx="1"/>
-          </p:nvPr>
-        </p:nvSpPr>
-        <p:spPr/>
-        <p:txBody>
-          <a:bodyPr/>
-          <a:lstStyle/>
-          <a:p>
-            <a:pPr lvl="0"/>
-            <a:r>
-              <a:rPr lang="en-US" smtClean="0"/>
-              <a:t>Click to edit Master text styles</a:t>
-            </a:r>
-          </a:p>
-          <a:p>
-            <a:pPr lvl="1"/>
-            <a:r>
-              <a:rPr lang="en-US" smtClean="0"/>
-              <a:t>Second level</a:t>
-            </a:r>
-          </a:p>
-          <a:p>
-            <a:pPr lvl="2"/>
-            <a:r>
-              <a:rPr lang="en-US" smtClean="0"/>
-              <a:t>Third level</a:t>
-            </a:r>
-          </a:p>
-          <a:p>
-            <a:pPr lvl="3"/>
-            <a:r>
-              <a:rPr lang="en-US" smtClean="0"/>
-              <a:t>Fourth level</a:t>
-            </a:r>
-          </a:p>
-          <a:p>
-            <a:pPr lvl="4"/>
-            <a:r>
-              <a:rPr lang="en-US" smtClean="0"/>
-              <a:t>Fifth level</a:t>
-            </a:r>
-            <a:endParaRPr lang="en-US"/>
-          </a:p>
-        </p:txBody>
-      </p:sp>
-      <p:sp>
-        <p:nvSpPr>
-          <p:cNvPr id="4" name="Date Placeholder 3"/>
-          <p:cNvSpPr>
-            <a:spLocks noGrp="1"/>
-          </p:cNvSpPr>
-          <p:nvPr>
-            <p:ph type="dt" sz="half" idx="10"/>
-          </p:nvPr>
-        </p:nvSpPr>
-        <p:spPr/>
-        <p:txBody>
-          <a:bodyPr/>
-          <a:lstStyle/>
-          <a:p>
-            <a:fld id="{5BCAD085-E8A6-8845-BD4E-CB4CCA059FC4}" type="datetimeFigureOut">
-              <a:rPr lang="en-US" smtClean="0"/>
-              <a:t>1/27/13</a:t>
+              <a:t>10/30/2023</a:t>
             </a:fld>
             <a:endParaRPr lang="en-US"/>
           </a:p>
@@ -816,7 +882,13 @@
       </p:sp>
       <p:sp>
         <p:nvSpPr>
-          <p:cNvPr id="5" name="Footer Placeholder 4"/>
+          <p:cNvPr id="5" name="Footer Placeholder 4">
+            <a:extLst>
+              <a:ext uri="{FF2B5EF4-FFF2-40B4-BE49-F238E27FC236}">
+                <a16:creationId xmlns:a16="http://schemas.microsoft.com/office/drawing/2014/main" id="{5C0E46C1-E902-798D-68F8-AF167F50864E}"/>
+              </a:ext>
+            </a:extLst>
+          </p:cNvPr>
           <p:cNvSpPr>
             <a:spLocks noGrp="1"/>
           </p:cNvSpPr>
@@ -835,7 +907,13 @@
       </p:sp>
       <p:sp>
         <p:nvSpPr>
-          <p:cNvPr id="6" name="Slide Number Placeholder 5"/>
+          <p:cNvPr id="6" name="Slide Number Placeholder 5">
+            <a:extLst>
+              <a:ext uri="{FF2B5EF4-FFF2-40B4-BE49-F238E27FC236}">
+                <a16:creationId xmlns:a16="http://schemas.microsoft.com/office/drawing/2014/main" id="{D67A3B31-6796-B72F-06A0-943949E9294B}"/>
+              </a:ext>
+            </a:extLst>
+          </p:cNvPr>
           <p:cNvSpPr>
             <a:spLocks noGrp="1"/>
           </p:cNvSpPr>
@@ -848,7 +926,7 @@
           <a:bodyPr/>
           <a:lstStyle/>
           <a:p>
-            <a:fld id="{C1FF6DA9-008F-8B48-92A6-B652298478BF}" type="slidenum">
+            <a:fld id="{39D2B1DD-CD0E-4D8F-8F2D-CD486A006DF6}" type="slidenum">
               <a:rPr lang="en-US" smtClean="0"/>
               <a:t>‹#›</a:t>
             </a:fld>
@@ -859,7 +937,7 @@
     </p:spTree>
     <p:extLst>
       <p:ext uri="{BB962C8B-B14F-4D97-AF65-F5344CB8AC3E}">
-        <p14:creationId xmlns:p14="http://schemas.microsoft.com/office/powerpoint/2010/main" val="2614314258"/>
+        <p14:creationId xmlns:p14="http://schemas.microsoft.com/office/powerpoint/2010/main" val="789669580"/>
       </p:ext>
     </p:extLst>
   </p:cSld>
@@ -888,7 +966,13 @@
       </p:grpSpPr>
       <p:sp>
         <p:nvSpPr>
-          <p:cNvPr id="2" name="Title 1"/>
+          <p:cNvPr id="2" name="Title 1">
+            <a:extLst>
+              <a:ext uri="{FF2B5EF4-FFF2-40B4-BE49-F238E27FC236}">
+                <a16:creationId xmlns:a16="http://schemas.microsoft.com/office/drawing/2014/main" id="{069F3CCD-88F3-C096-701E-182CF2DD6ACC}"/>
+              </a:ext>
+            </a:extLst>
+          </p:cNvPr>
           <p:cNvSpPr>
             <a:spLocks noGrp="1"/>
           </p:cNvSpPr>
@@ -898,29 +982,34 @@
         </p:nvSpPr>
         <p:spPr>
           <a:xfrm>
-            <a:off x="722313" y="4406900"/>
-            <a:ext cx="7772400" cy="1362075"/>
+            <a:off x="831850" y="1709738"/>
+            <a:ext cx="10515600" cy="2852737"/>
           </a:xfrm>
         </p:spPr>
         <p:txBody>
-          <a:bodyPr anchor="t"/>
+          <a:bodyPr anchor="b"/>
           <a:lstStyle>
-            <a:lvl1pPr algn="l">
-              <a:defRPr sz="4000" b="1" cap="all"/>
+            <a:lvl1pPr>
+              <a:defRPr sz="6000"/>
             </a:lvl1pPr>
           </a:lstStyle>
           <a:p>
             <a:r>
-              <a:rPr lang="en-US" smtClean="0"/>
+              <a:rPr lang="en-US"/>
               <a:t>Click to edit Master title style</a:t>
             </a:r>
-            <a:endParaRPr lang="en-US"/>
-          </a:p>
-        </p:txBody>
-      </p:sp>
-      <p:sp>
-        <p:nvSpPr>
-          <p:cNvPr id="3" name="Text Placeholder 2"/>
+          </a:p>
+        </p:txBody>
+      </p:sp>
+      <p:sp>
+        <p:nvSpPr>
+          <p:cNvPr id="3" name="Text Placeholder 2">
+            <a:extLst>
+              <a:ext uri="{FF2B5EF4-FFF2-40B4-BE49-F238E27FC236}">
+                <a16:creationId xmlns:a16="http://schemas.microsoft.com/office/drawing/2014/main" id="{0CFC41C6-A6B8-0BF2-6B8B-99B368C10D56}"/>
+              </a:ext>
+            </a:extLst>
+          </p:cNvPr>
           <p:cNvSpPr>
             <a:spLocks noGrp="1"/>
           </p:cNvSpPr>
@@ -930,16 +1019,16 @@
         </p:nvSpPr>
         <p:spPr>
           <a:xfrm>
-            <a:off x="722313" y="2906713"/>
-            <a:ext cx="7772400" cy="1500187"/>
+            <a:off x="831850" y="4589463"/>
+            <a:ext cx="10515600" cy="1500187"/>
           </a:xfrm>
         </p:spPr>
         <p:txBody>
-          <a:bodyPr anchor="b"/>
+          <a:bodyPr/>
           <a:lstStyle>
             <a:lvl1pPr marL="0" indent="0">
               <a:buNone/>
-              <a:defRPr sz="2000">
+              <a:defRPr sz="2400">
                 <a:solidFill>
                   <a:schemeClr val="tx1">
                     <a:tint val="75000"/>
@@ -949,7 +1038,7 @@
             </a:lvl1pPr>
             <a:lvl2pPr marL="457200" indent="0">
               <a:buNone/>
-              <a:defRPr sz="1800">
+              <a:defRPr sz="2000">
                 <a:solidFill>
                   <a:schemeClr val="tx1">
                     <a:tint val="75000"/>
@@ -959,7 +1048,7 @@
             </a:lvl2pPr>
             <a:lvl3pPr marL="914400" indent="0">
               <a:buNone/>
-              <a:defRPr sz="1600">
+              <a:defRPr sz="1800">
                 <a:solidFill>
                   <a:schemeClr val="tx1">
                     <a:tint val="75000"/>
@@ -969,7 +1058,7 @@
             </a:lvl3pPr>
             <a:lvl4pPr marL="1371600" indent="0">
               <a:buNone/>
-              <a:defRPr sz="1400">
+              <a:defRPr sz="1600">
                 <a:solidFill>
                   <a:schemeClr val="tx1">
                     <a:tint val="75000"/>
@@ -979,7 +1068,7 @@
             </a:lvl4pPr>
             <a:lvl5pPr marL="1828800" indent="0">
               <a:buNone/>
-              <a:defRPr sz="1400">
+              <a:defRPr sz="1600">
                 <a:solidFill>
                   <a:schemeClr val="tx1">
                     <a:tint val="75000"/>
@@ -989,7 +1078,7 @@
             </a:lvl5pPr>
             <a:lvl6pPr marL="2286000" indent="0">
               <a:buNone/>
-              <a:defRPr sz="1400">
+              <a:defRPr sz="1600">
                 <a:solidFill>
                   <a:schemeClr val="tx1">
                     <a:tint val="75000"/>
@@ -999,7 +1088,7 @@
             </a:lvl6pPr>
             <a:lvl7pPr marL="2743200" indent="0">
               <a:buNone/>
-              <a:defRPr sz="1400">
+              <a:defRPr sz="1600">
                 <a:solidFill>
                   <a:schemeClr val="tx1">
                     <a:tint val="75000"/>
@@ -1009,7 +1098,7 @@
             </a:lvl7pPr>
             <a:lvl8pPr marL="3200400" indent="0">
               <a:buNone/>
-              <a:defRPr sz="1400">
+              <a:defRPr sz="1600">
                 <a:solidFill>
                   <a:schemeClr val="tx1">
                     <a:tint val="75000"/>
@@ -1019,7 +1108,7 @@
             </a:lvl8pPr>
             <a:lvl9pPr marL="3657600" indent="0">
               <a:buNone/>
-              <a:defRPr sz="1400">
+              <a:defRPr sz="1600">
                 <a:solidFill>
                   <a:schemeClr val="tx1">
                     <a:tint val="75000"/>
@@ -1031,30 +1120,36 @@
           <a:p>
             <a:pPr lvl="0"/>
             <a:r>
+              <a:rPr lang="en-US"/>
+              <a:t>Click to edit Master text styles</a:t>
+            </a:r>
+          </a:p>
+        </p:txBody>
+      </p:sp>
+      <p:sp>
+        <p:nvSpPr>
+          <p:cNvPr id="4" name="Date Placeholder 3">
+            <a:extLst>
+              <a:ext uri="{FF2B5EF4-FFF2-40B4-BE49-F238E27FC236}">
+                <a16:creationId xmlns:a16="http://schemas.microsoft.com/office/drawing/2014/main" id="{5ADC49F5-5E0F-AF1C-CFF3-5641C5565AAB}"/>
+              </a:ext>
+            </a:extLst>
+          </p:cNvPr>
+          <p:cNvSpPr>
+            <a:spLocks noGrp="1"/>
+          </p:cNvSpPr>
+          <p:nvPr>
+            <p:ph type="dt" sz="half" idx="10"/>
+          </p:nvPr>
+        </p:nvSpPr>
+        <p:spPr/>
+        <p:txBody>
+          <a:bodyPr/>
+          <a:lstStyle/>
+          <a:p>
+            <a:fld id="{DE25E60F-0558-4F08-8A9F-A8C7708DFBAC}" type="datetimeFigureOut">
               <a:rPr lang="en-US" smtClean="0"/>
-              <a:t>Click to edit Master text styles</a:t>
-            </a:r>
-          </a:p>
-        </p:txBody>
-      </p:sp>
-      <p:sp>
-        <p:nvSpPr>
-          <p:cNvPr id="4" name="Date Placeholder 3"/>
-          <p:cNvSpPr>
-            <a:spLocks noGrp="1"/>
-          </p:cNvSpPr>
-          <p:nvPr>
-            <p:ph type="dt" sz="half" idx="10"/>
-          </p:nvPr>
-        </p:nvSpPr>
-        <p:spPr/>
-        <p:txBody>
-          <a:bodyPr/>
-          <a:lstStyle/>
-          <a:p>
-            <a:fld id="{5BCAD085-E8A6-8845-BD4E-CB4CCA059FC4}" type="datetimeFigureOut">
-              <a:rPr lang="en-US" smtClean="0"/>
-              <a:t>1/27/13</a:t>
+              <a:t>10/30/2023</a:t>
             </a:fld>
             <a:endParaRPr lang="en-US"/>
           </a:p>
@@ -1062,7 +1157,13 @@
       </p:sp>
       <p:sp>
         <p:nvSpPr>
-          <p:cNvPr id="5" name="Footer Placeholder 4"/>
+          <p:cNvPr id="5" name="Footer Placeholder 4">
+            <a:extLst>
+              <a:ext uri="{FF2B5EF4-FFF2-40B4-BE49-F238E27FC236}">
+                <a16:creationId xmlns:a16="http://schemas.microsoft.com/office/drawing/2014/main" id="{07FF3990-51CD-3DCC-D538-EE04057F3103}"/>
+              </a:ext>
+            </a:extLst>
+          </p:cNvPr>
           <p:cNvSpPr>
             <a:spLocks noGrp="1"/>
           </p:cNvSpPr>
@@ -1081,7 +1182,13 @@
       </p:sp>
       <p:sp>
         <p:nvSpPr>
-          <p:cNvPr id="6" name="Slide Number Placeholder 5"/>
+          <p:cNvPr id="6" name="Slide Number Placeholder 5">
+            <a:extLst>
+              <a:ext uri="{FF2B5EF4-FFF2-40B4-BE49-F238E27FC236}">
+                <a16:creationId xmlns:a16="http://schemas.microsoft.com/office/drawing/2014/main" id="{F21D9068-B576-075B-2D3A-C9D3618A0D58}"/>
+              </a:ext>
+            </a:extLst>
+          </p:cNvPr>
           <p:cNvSpPr>
             <a:spLocks noGrp="1"/>
           </p:cNvSpPr>
@@ -1094,7 +1201,7 @@
           <a:bodyPr/>
           <a:lstStyle/>
           <a:p>
-            <a:fld id="{C1FF6DA9-008F-8B48-92A6-B652298478BF}" type="slidenum">
+            <a:fld id="{39D2B1DD-CD0E-4D8F-8F2D-CD486A006DF6}" type="slidenum">
               <a:rPr lang="en-US" smtClean="0"/>
               <a:t>‹#›</a:t>
             </a:fld>
@@ -1105,7 +1212,7 @@
     </p:spTree>
     <p:extLst>
       <p:ext uri="{BB962C8B-B14F-4D97-AF65-F5344CB8AC3E}">
-        <p14:creationId xmlns:p14="http://schemas.microsoft.com/office/powerpoint/2010/main" val="960648375"/>
+        <p14:creationId xmlns:p14="http://schemas.microsoft.com/office/powerpoint/2010/main" val="2794340131"/>
       </p:ext>
     </p:extLst>
   </p:cSld>
@@ -1134,7 +1241,13 @@
       </p:grpSpPr>
       <p:sp>
         <p:nvSpPr>
-          <p:cNvPr id="2" name="Title 1"/>
+          <p:cNvPr id="2" name="Title 1">
+            <a:extLst>
+              <a:ext uri="{FF2B5EF4-FFF2-40B4-BE49-F238E27FC236}">
+                <a16:creationId xmlns:a16="http://schemas.microsoft.com/office/drawing/2014/main" id="{22844E9B-308B-5D3B-98BE-B1AEE5E0A51E}"/>
+              </a:ext>
+            </a:extLst>
+          </p:cNvPr>
           <p:cNvSpPr>
             <a:spLocks noGrp="1"/>
           </p:cNvSpPr>
@@ -1148,16 +1261,21 @@
           <a:lstStyle/>
           <a:p>
             <a:r>
-              <a:rPr lang="en-US" smtClean="0"/>
+              <a:rPr lang="en-US"/>
               <a:t>Click to edit Master title style</a:t>
             </a:r>
-            <a:endParaRPr lang="en-US"/>
-          </a:p>
-        </p:txBody>
-      </p:sp>
-      <p:sp>
-        <p:nvSpPr>
-          <p:cNvPr id="3" name="Content Placeholder 2"/>
+          </a:p>
+        </p:txBody>
+      </p:sp>
+      <p:sp>
+        <p:nvSpPr>
+          <p:cNvPr id="3" name="Content Placeholder 2">
+            <a:extLst>
+              <a:ext uri="{FF2B5EF4-FFF2-40B4-BE49-F238E27FC236}">
+                <a16:creationId xmlns:a16="http://schemas.microsoft.com/office/drawing/2014/main" id="{C5A360A0-0D22-00F1-5C6A-1B8E02C7546B}"/>
+              </a:ext>
+            </a:extLst>
+          </p:cNvPr>
           <p:cNvSpPr>
             <a:spLocks noGrp="1"/>
           </p:cNvSpPr>
@@ -1167,82 +1285,59 @@
         </p:nvSpPr>
         <p:spPr>
           <a:xfrm>
-            <a:off x="457200" y="1600200"/>
-            <a:ext cx="4038600" cy="4525963"/>
+            <a:off x="838200" y="1825625"/>
+            <a:ext cx="5181600" cy="4351338"/>
           </a:xfrm>
         </p:spPr>
         <p:txBody>
           <a:bodyPr/>
-          <a:lstStyle>
-            <a:lvl1pPr>
-              <a:defRPr sz="2800"/>
-            </a:lvl1pPr>
-            <a:lvl2pPr>
-              <a:defRPr sz="2400"/>
-            </a:lvl2pPr>
-            <a:lvl3pPr>
-              <a:defRPr sz="2000"/>
-            </a:lvl3pPr>
-            <a:lvl4pPr>
-              <a:defRPr sz="1800"/>
-            </a:lvl4pPr>
-            <a:lvl5pPr>
-              <a:defRPr sz="1800"/>
-            </a:lvl5pPr>
-            <a:lvl6pPr>
-              <a:defRPr sz="1800"/>
-            </a:lvl6pPr>
-            <a:lvl7pPr>
-              <a:defRPr sz="1800"/>
-            </a:lvl7pPr>
-            <a:lvl8pPr>
-              <a:defRPr sz="1800"/>
-            </a:lvl8pPr>
-            <a:lvl9pPr>
-              <a:defRPr sz="1800"/>
-            </a:lvl9pPr>
-          </a:lstStyle>
+          <a:lstStyle/>
           <a:p>
             <a:pPr lvl="0"/>
             <a:r>
-              <a:rPr lang="en-US" smtClean="0"/>
+              <a:rPr lang="en-US"/>
               <a:t>Click to edit Master text styles</a:t>
             </a:r>
           </a:p>
           <a:p>
             <a:pPr lvl="1"/>
             <a:r>
-              <a:rPr lang="en-US" smtClean="0"/>
+              <a:rPr lang="en-US"/>
               <a:t>Second level</a:t>
             </a:r>
           </a:p>
           <a:p>
             <a:pPr lvl="2"/>
             <a:r>
-              <a:rPr lang="en-US" smtClean="0"/>
+              <a:rPr lang="en-US"/>
               <a:t>Third level</a:t>
             </a:r>
           </a:p>
           <a:p>
             <a:pPr lvl="3"/>
             <a:r>
-              <a:rPr lang="en-US" smtClean="0"/>
+              <a:rPr lang="en-US"/>
               <a:t>Fourth level</a:t>
             </a:r>
           </a:p>
           <a:p>
             <a:pPr lvl="4"/>
             <a:r>
-              <a:rPr lang="en-US" smtClean="0"/>
+              <a:rPr lang="en-US"/>
               <a:t>Fifth level</a:t>
             </a:r>
-            <a:endParaRPr lang="en-US"/>
-          </a:p>
-        </p:txBody>
-      </p:sp>
-      <p:sp>
-        <p:nvSpPr>
-          <p:cNvPr id="4" name="Content Placeholder 3"/>
+          </a:p>
+        </p:txBody>
+      </p:sp>
+      <p:sp>
+        <p:nvSpPr>
+          <p:cNvPr id="4" name="Content Placeholder 3">
+            <a:extLst>
+              <a:ext uri="{FF2B5EF4-FFF2-40B4-BE49-F238E27FC236}">
+                <a16:creationId xmlns:a16="http://schemas.microsoft.com/office/drawing/2014/main" id="{3612AFD5-97BD-D722-6120-141FD3B65007}"/>
+              </a:ext>
+            </a:extLst>
+          </p:cNvPr>
           <p:cNvSpPr>
             <a:spLocks noGrp="1"/>
           </p:cNvSpPr>
@@ -1252,97 +1347,74 @@
         </p:nvSpPr>
         <p:spPr>
           <a:xfrm>
-            <a:off x="4648200" y="1600200"/>
-            <a:ext cx="4038600" cy="4525963"/>
+            <a:off x="6172200" y="1825625"/>
+            <a:ext cx="5181600" cy="4351338"/>
           </a:xfrm>
         </p:spPr>
         <p:txBody>
           <a:bodyPr/>
-          <a:lstStyle>
-            <a:lvl1pPr>
-              <a:defRPr sz="2800"/>
-            </a:lvl1pPr>
-            <a:lvl2pPr>
-              <a:defRPr sz="2400"/>
-            </a:lvl2pPr>
-            <a:lvl3pPr>
-              <a:defRPr sz="2000"/>
-            </a:lvl3pPr>
-            <a:lvl4pPr>
-              <a:defRPr sz="1800"/>
-            </a:lvl4pPr>
-            <a:lvl5pPr>
-              <a:defRPr sz="1800"/>
-            </a:lvl5pPr>
-            <a:lvl6pPr>
-              <a:defRPr sz="1800"/>
-            </a:lvl6pPr>
-            <a:lvl7pPr>
-              <a:defRPr sz="1800"/>
-            </a:lvl7pPr>
-            <a:lvl8pPr>
-              <a:defRPr sz="1800"/>
-            </a:lvl8pPr>
-            <a:lvl9pPr>
-              <a:defRPr sz="1800"/>
-            </a:lvl9pPr>
-          </a:lstStyle>
+          <a:lstStyle/>
           <a:p>
             <a:pPr lvl="0"/>
             <a:r>
+              <a:rPr lang="en-US"/>
+              <a:t>Click to edit Master text styles</a:t>
+            </a:r>
+          </a:p>
+          <a:p>
+            <a:pPr lvl="1"/>
+            <a:r>
+              <a:rPr lang="en-US"/>
+              <a:t>Second level</a:t>
+            </a:r>
+          </a:p>
+          <a:p>
+            <a:pPr lvl="2"/>
+            <a:r>
+              <a:rPr lang="en-US"/>
+              <a:t>Third level</a:t>
+            </a:r>
+          </a:p>
+          <a:p>
+            <a:pPr lvl="3"/>
+            <a:r>
+              <a:rPr lang="en-US"/>
+              <a:t>Fourth level</a:t>
+            </a:r>
+          </a:p>
+          <a:p>
+            <a:pPr lvl="4"/>
+            <a:r>
+              <a:rPr lang="en-US"/>
+              <a:t>Fifth level</a:t>
+            </a:r>
+          </a:p>
+        </p:txBody>
+      </p:sp>
+      <p:sp>
+        <p:nvSpPr>
+          <p:cNvPr id="5" name="Date Placeholder 4">
+            <a:extLst>
+              <a:ext uri="{FF2B5EF4-FFF2-40B4-BE49-F238E27FC236}">
+                <a16:creationId xmlns:a16="http://schemas.microsoft.com/office/drawing/2014/main" id="{0149C1BF-F9B6-712D-65FC-0736E981B79A}"/>
+              </a:ext>
+            </a:extLst>
+          </p:cNvPr>
+          <p:cNvSpPr>
+            <a:spLocks noGrp="1"/>
+          </p:cNvSpPr>
+          <p:nvPr>
+            <p:ph type="dt" sz="half" idx="10"/>
+          </p:nvPr>
+        </p:nvSpPr>
+        <p:spPr/>
+        <p:txBody>
+          <a:bodyPr/>
+          <a:lstStyle/>
+          <a:p>
+            <a:fld id="{DE25E60F-0558-4F08-8A9F-A8C7708DFBAC}" type="datetimeFigureOut">
               <a:rPr lang="en-US" smtClean="0"/>
-              <a:t>Click to edit Master text styles</a:t>
-            </a:r>
-          </a:p>
-          <a:p>
-            <a:pPr lvl="1"/>
-            <a:r>
-              <a:rPr lang="en-US" smtClean="0"/>
-              <a:t>Second level</a:t>
-            </a:r>
-          </a:p>
-          <a:p>
-            <a:pPr lvl="2"/>
-            <a:r>
-              <a:rPr lang="en-US" smtClean="0"/>
-              <a:t>Third level</a:t>
-            </a:r>
-          </a:p>
-          <a:p>
-            <a:pPr lvl="3"/>
-            <a:r>
-              <a:rPr lang="en-US" smtClean="0"/>
-              <a:t>Fourth level</a:t>
-            </a:r>
-          </a:p>
-          <a:p>
-            <a:pPr lvl="4"/>
-            <a:r>
-              <a:rPr lang="en-US" smtClean="0"/>
-              <a:t>Fifth level</a:t>
-            </a:r>
-            <a:endParaRPr lang="en-US"/>
-          </a:p>
-        </p:txBody>
-      </p:sp>
-      <p:sp>
-        <p:nvSpPr>
-          <p:cNvPr id="5" name="Date Placeholder 4"/>
-          <p:cNvSpPr>
-            <a:spLocks noGrp="1"/>
-          </p:cNvSpPr>
-          <p:nvPr>
-            <p:ph type="dt" sz="half" idx="10"/>
-          </p:nvPr>
-        </p:nvSpPr>
-        <p:spPr/>
-        <p:txBody>
-          <a:bodyPr/>
-          <a:lstStyle/>
-          <a:p>
-            <a:fld id="{5BCAD085-E8A6-8845-BD4E-CB4CCA059FC4}" type="datetimeFigureOut">
-              <a:rPr lang="en-US" smtClean="0"/>
-              <a:t>1/27/13</a:t>
+              <a:t>10/30/2023</a:t>
             </a:fld>
             <a:endParaRPr lang="en-US"/>
           </a:p>
@@ -1350,7 +1422,13 @@
       </p:sp>
       <p:sp>
         <p:nvSpPr>
-          <p:cNvPr id="6" name="Footer Placeholder 5"/>
+          <p:cNvPr id="6" name="Footer Placeholder 5">
+            <a:extLst>
+              <a:ext uri="{FF2B5EF4-FFF2-40B4-BE49-F238E27FC236}">
+                <a16:creationId xmlns:a16="http://schemas.microsoft.com/office/drawing/2014/main" id="{A1F80C35-4C9B-0818-E52B-2236990AD9F0}"/>
+              </a:ext>
+            </a:extLst>
+          </p:cNvPr>
           <p:cNvSpPr>
             <a:spLocks noGrp="1"/>
           </p:cNvSpPr>
@@ -1369,7 +1447,13 @@
       </p:sp>
       <p:sp>
         <p:nvSpPr>
-          <p:cNvPr id="7" name="Slide Number Placeholder 6"/>
+          <p:cNvPr id="7" name="Slide Number Placeholder 6">
+            <a:extLst>
+              <a:ext uri="{FF2B5EF4-FFF2-40B4-BE49-F238E27FC236}">
+                <a16:creationId xmlns:a16="http://schemas.microsoft.com/office/drawing/2014/main" id="{EA43D09A-E733-553B-F32E-C9BA6FF28E8F}"/>
+              </a:ext>
+            </a:extLst>
+          </p:cNvPr>
           <p:cNvSpPr>
             <a:spLocks noGrp="1"/>
           </p:cNvSpPr>
@@ -1382,7 +1466,7 @@
           <a:bodyPr/>
           <a:lstStyle/>
           <a:p>
-            <a:fld id="{C1FF6DA9-008F-8B48-92A6-B652298478BF}" type="slidenum">
+            <a:fld id="{39D2B1DD-CD0E-4D8F-8F2D-CD486A006DF6}" type="slidenum">
               <a:rPr lang="en-US" smtClean="0"/>
               <a:t>‹#›</a:t>
             </a:fld>
@@ -1393,7 +1477,7 @@
     </p:spTree>
     <p:extLst>
       <p:ext uri="{BB962C8B-B14F-4D97-AF65-F5344CB8AC3E}">
-        <p14:creationId xmlns:p14="http://schemas.microsoft.com/office/powerpoint/2010/main" val="2782244947"/>
+        <p14:creationId xmlns:p14="http://schemas.microsoft.com/office/powerpoint/2010/main" val="3369809804"/>
       </p:ext>
     </p:extLst>
   </p:cSld>
@@ -1422,45 +1506,57 @@
       </p:grpSpPr>
       <p:sp>
         <p:nvSpPr>
-          <p:cNvPr id="2" name="Title 1"/>
+          <p:cNvPr id="2" name="Title 1">
+            <a:extLst>
+              <a:ext uri="{FF2B5EF4-FFF2-40B4-BE49-F238E27FC236}">
+                <a16:creationId xmlns:a16="http://schemas.microsoft.com/office/drawing/2014/main" id="{948C1FA1-1D09-061C-B2A7-7B24B263EAF1}"/>
+              </a:ext>
+            </a:extLst>
+          </p:cNvPr>
           <p:cNvSpPr>
             <a:spLocks noGrp="1"/>
           </p:cNvSpPr>
           <p:nvPr>
             <p:ph type="title"/>
-          </p:nvPr>
-        </p:nvSpPr>
-        <p:spPr/>
-        <p:txBody>
-          <a:bodyPr/>
-          <a:lstStyle>
-            <a:lvl1pPr>
-              <a:defRPr/>
-            </a:lvl1pPr>
-          </a:lstStyle>
-          <a:p>
-            <a:r>
-              <a:rPr lang="en-US" smtClean="0"/>
-              <a:t>Click to edit Master title style</a:t>
-            </a:r>
-            <a:endParaRPr lang="en-US"/>
-          </a:p>
-        </p:txBody>
-      </p:sp>
-      <p:sp>
-        <p:nvSpPr>
-          <p:cNvPr id="3" name="Text Placeholder 2"/>
-          <p:cNvSpPr>
-            <a:spLocks noGrp="1"/>
-          </p:cNvSpPr>
-          <p:nvPr>
-            <p:ph type="body" idx="1"/>
           </p:nvPr>
         </p:nvSpPr>
         <p:spPr>
           <a:xfrm>
-            <a:off x="457200" y="1535113"/>
-            <a:ext cx="4040188" cy="639762"/>
+            <a:off x="839788" y="365125"/>
+            <a:ext cx="10515600" cy="1325563"/>
+          </a:xfrm>
+        </p:spPr>
+        <p:txBody>
+          <a:bodyPr/>
+          <a:lstStyle/>
+          <a:p>
+            <a:r>
+              <a:rPr lang="en-US"/>
+              <a:t>Click to edit Master title style</a:t>
+            </a:r>
+          </a:p>
+        </p:txBody>
+      </p:sp>
+      <p:sp>
+        <p:nvSpPr>
+          <p:cNvPr id="3" name="Text Placeholder 2">
+            <a:extLst>
+              <a:ext uri="{FF2B5EF4-FFF2-40B4-BE49-F238E27FC236}">
+                <a16:creationId xmlns:a16="http://schemas.microsoft.com/office/drawing/2014/main" id="{8E2AA7E7-B764-4F05-86A4-9708F9310926}"/>
+              </a:ext>
+            </a:extLst>
+          </p:cNvPr>
+          <p:cNvSpPr>
+            <a:spLocks noGrp="1"/>
+          </p:cNvSpPr>
+          <p:nvPr>
+            <p:ph type="body" idx="1"/>
+          </p:nvPr>
+        </p:nvSpPr>
+        <p:spPr>
+          <a:xfrm>
+            <a:off x="839788" y="1681163"/>
+            <a:ext cx="5157787" cy="823912"/>
           </a:xfrm>
         </p:spPr>
         <p:txBody>
@@ -1506,7 +1602,7 @@
           <a:p>
             <a:pPr lvl="0"/>
             <a:r>
-              <a:rPr lang="en-US" smtClean="0"/>
+              <a:rPr lang="en-US"/>
               <a:t>Click to edit Master text styles</a:t>
             </a:r>
           </a:p>
@@ -1514,7 +1610,13 @@
       </p:sp>
       <p:sp>
         <p:nvSpPr>
-          <p:cNvPr id="4" name="Content Placeholder 3"/>
+          <p:cNvPr id="4" name="Content Placeholder 3">
+            <a:extLst>
+              <a:ext uri="{FF2B5EF4-FFF2-40B4-BE49-F238E27FC236}">
+                <a16:creationId xmlns:a16="http://schemas.microsoft.com/office/drawing/2014/main" id="{F7FFF651-EB1B-738A-D13E-E901AE580FA1}"/>
+              </a:ext>
+            </a:extLst>
+          </p:cNvPr>
           <p:cNvSpPr>
             <a:spLocks noGrp="1"/>
           </p:cNvSpPr>
@@ -1524,82 +1626,59 @@
         </p:nvSpPr>
         <p:spPr>
           <a:xfrm>
-            <a:off x="457200" y="2174875"/>
-            <a:ext cx="4040188" cy="3951288"/>
+            <a:off x="839788" y="2505075"/>
+            <a:ext cx="5157787" cy="3684588"/>
           </a:xfrm>
         </p:spPr>
         <p:txBody>
           <a:bodyPr/>
-          <a:lstStyle>
-            <a:lvl1pPr>
-              <a:defRPr sz="2400"/>
-            </a:lvl1pPr>
-            <a:lvl2pPr>
-              <a:defRPr sz="2000"/>
-            </a:lvl2pPr>
-            <a:lvl3pPr>
-              <a:defRPr sz="1800"/>
-            </a:lvl3pPr>
-            <a:lvl4pPr>
-              <a:defRPr sz="1600"/>
-            </a:lvl4pPr>
-            <a:lvl5pPr>
-              <a:defRPr sz="1600"/>
-            </a:lvl5pPr>
-            <a:lvl6pPr>
-              <a:defRPr sz="1600"/>
-            </a:lvl6pPr>
-            <a:lvl7pPr>
-              <a:defRPr sz="1600"/>
-            </a:lvl7pPr>
-            <a:lvl8pPr>
-              <a:defRPr sz="1600"/>
-            </a:lvl8pPr>
-            <a:lvl9pPr>
-              <a:defRPr sz="1600"/>
-            </a:lvl9pPr>
-          </a:lstStyle>
+          <a:lstStyle/>
           <a:p>
             <a:pPr lvl="0"/>
             <a:r>
-              <a:rPr lang="en-US" smtClean="0"/>
+              <a:rPr lang="en-US"/>
               <a:t>Click to edit Master text styles</a:t>
             </a:r>
           </a:p>
           <a:p>
             <a:pPr lvl="1"/>
             <a:r>
-              <a:rPr lang="en-US" smtClean="0"/>
+              <a:rPr lang="en-US"/>
               <a:t>Second level</a:t>
             </a:r>
           </a:p>
           <a:p>
             <a:pPr lvl="2"/>
             <a:r>
-              <a:rPr lang="en-US" smtClean="0"/>
+              <a:rPr lang="en-US"/>
               <a:t>Third level</a:t>
             </a:r>
           </a:p>
           <a:p>
             <a:pPr lvl="3"/>
             <a:r>
-              <a:rPr lang="en-US" smtClean="0"/>
+              <a:rPr lang="en-US"/>
               <a:t>Fourth level</a:t>
             </a:r>
           </a:p>
           <a:p>
             <a:pPr lvl="4"/>
             <a:r>
-              <a:rPr lang="en-US" smtClean="0"/>
+              <a:rPr lang="en-US"/>
               <a:t>Fifth level</a:t>
             </a:r>
-            <a:endParaRPr lang="en-US"/>
-          </a:p>
-        </p:txBody>
-      </p:sp>
-      <p:sp>
-        <p:nvSpPr>
-          <p:cNvPr id="5" name="Text Placeholder 4"/>
+          </a:p>
+        </p:txBody>
+      </p:sp>
+      <p:sp>
+        <p:nvSpPr>
+          <p:cNvPr id="5" name="Text Placeholder 4">
+            <a:extLst>
+              <a:ext uri="{FF2B5EF4-FFF2-40B4-BE49-F238E27FC236}">
+                <a16:creationId xmlns:a16="http://schemas.microsoft.com/office/drawing/2014/main" id="{4AB7FA95-015D-F71C-E68F-85753E61F449}"/>
+              </a:ext>
+            </a:extLst>
+          </p:cNvPr>
           <p:cNvSpPr>
             <a:spLocks noGrp="1"/>
           </p:cNvSpPr>
@@ -1609,8 +1688,8 @@
         </p:nvSpPr>
         <p:spPr>
           <a:xfrm>
-            <a:off x="4645025" y="1535113"/>
-            <a:ext cx="4041775" cy="639762"/>
+            <a:off x="6172200" y="1681163"/>
+            <a:ext cx="5183188" cy="823912"/>
           </a:xfrm>
         </p:spPr>
         <p:txBody>
@@ -1656,7 +1735,7 @@
           <a:p>
             <a:pPr lvl="0"/>
             <a:r>
-              <a:rPr lang="en-US" smtClean="0"/>
+              <a:rPr lang="en-US"/>
               <a:t>Click to edit Master text styles</a:t>
             </a:r>
           </a:p>
@@ -1664,7 +1743,13 @@
       </p:sp>
       <p:sp>
         <p:nvSpPr>
-          <p:cNvPr id="6" name="Content Placeholder 5"/>
+          <p:cNvPr id="6" name="Content Placeholder 5">
+            <a:extLst>
+              <a:ext uri="{FF2B5EF4-FFF2-40B4-BE49-F238E27FC236}">
+                <a16:creationId xmlns:a16="http://schemas.microsoft.com/office/drawing/2014/main" id="{C30EA796-F3D6-1581-F573-AFF53BDB69A5}"/>
+              </a:ext>
+            </a:extLst>
+          </p:cNvPr>
           <p:cNvSpPr>
             <a:spLocks noGrp="1"/>
           </p:cNvSpPr>
@@ -1674,97 +1759,74 @@
         </p:nvSpPr>
         <p:spPr>
           <a:xfrm>
-            <a:off x="4645025" y="2174875"/>
-            <a:ext cx="4041775" cy="3951288"/>
+            <a:off x="6172200" y="2505075"/>
+            <a:ext cx="5183188" cy="3684588"/>
           </a:xfrm>
         </p:spPr>
         <p:txBody>
           <a:bodyPr/>
-          <a:lstStyle>
-            <a:lvl1pPr>
-              <a:defRPr sz="2400"/>
-            </a:lvl1pPr>
-            <a:lvl2pPr>
-              <a:defRPr sz="2000"/>
-            </a:lvl2pPr>
-            <a:lvl3pPr>
-              <a:defRPr sz="1800"/>
-            </a:lvl3pPr>
-            <a:lvl4pPr>
-              <a:defRPr sz="1600"/>
-            </a:lvl4pPr>
-            <a:lvl5pPr>
-              <a:defRPr sz="1600"/>
-            </a:lvl5pPr>
-            <a:lvl6pPr>
-              <a:defRPr sz="1600"/>
-            </a:lvl6pPr>
-            <a:lvl7pPr>
-              <a:defRPr sz="1600"/>
-            </a:lvl7pPr>
-            <a:lvl8pPr>
-              <a:defRPr sz="1600"/>
-            </a:lvl8pPr>
-            <a:lvl9pPr>
-              <a:defRPr sz="1600"/>
-            </a:lvl9pPr>
-          </a:lstStyle>
+          <a:lstStyle/>
           <a:p>
             <a:pPr lvl="0"/>
             <a:r>
+              <a:rPr lang="en-US"/>
+              <a:t>Click to edit Master text styles</a:t>
+            </a:r>
+          </a:p>
+          <a:p>
+            <a:pPr lvl="1"/>
+            <a:r>
+              <a:rPr lang="en-US"/>
+              <a:t>Second level</a:t>
+            </a:r>
+          </a:p>
+          <a:p>
+            <a:pPr lvl="2"/>
+            <a:r>
+              <a:rPr lang="en-US"/>
+              <a:t>Third level</a:t>
+            </a:r>
+          </a:p>
+          <a:p>
+            <a:pPr lvl="3"/>
+            <a:r>
+              <a:rPr lang="en-US"/>
+              <a:t>Fourth level</a:t>
+            </a:r>
+          </a:p>
+          <a:p>
+            <a:pPr lvl="4"/>
+            <a:r>
+              <a:rPr lang="en-US"/>
+              <a:t>Fifth level</a:t>
+            </a:r>
+          </a:p>
+        </p:txBody>
+      </p:sp>
+      <p:sp>
+        <p:nvSpPr>
+          <p:cNvPr id="7" name="Date Placeholder 6">
+            <a:extLst>
+              <a:ext uri="{FF2B5EF4-FFF2-40B4-BE49-F238E27FC236}">
+                <a16:creationId xmlns:a16="http://schemas.microsoft.com/office/drawing/2014/main" id="{3389E630-BEB8-2EEF-A5E4-AC4015052F6B}"/>
+              </a:ext>
+            </a:extLst>
+          </p:cNvPr>
+          <p:cNvSpPr>
+            <a:spLocks noGrp="1"/>
+          </p:cNvSpPr>
+          <p:nvPr>
+            <p:ph type="dt" sz="half" idx="10"/>
+          </p:nvPr>
+        </p:nvSpPr>
+        <p:spPr/>
+        <p:txBody>
+          <a:bodyPr/>
+          <a:lstStyle/>
+          <a:p>
+            <a:fld id="{DE25E60F-0558-4F08-8A9F-A8C7708DFBAC}" type="datetimeFigureOut">
               <a:rPr lang="en-US" smtClean="0"/>
-              <a:t>Click to edit Master text styles</a:t>
-            </a:r>
-          </a:p>
-          <a:p>
-            <a:pPr lvl="1"/>
-            <a:r>
-              <a:rPr lang="en-US" smtClean="0"/>
-              <a:t>Second level</a:t>
-            </a:r>
-          </a:p>
-          <a:p>
-            <a:pPr lvl="2"/>
-            <a:r>
-              <a:rPr lang="en-US" smtClean="0"/>
-              <a:t>Third level</a:t>
-            </a:r>
-          </a:p>
-          <a:p>
-            <a:pPr lvl="3"/>
-            <a:r>
-              <a:rPr lang="en-US" smtClean="0"/>
-              <a:t>Fourth level</a:t>
-            </a:r>
-          </a:p>
-          <a:p>
-            <a:pPr lvl="4"/>
-            <a:r>
-              <a:rPr lang="en-US" smtClean="0"/>
-              <a:t>Fifth level</a:t>
-            </a:r>
-            <a:endParaRPr lang="en-US"/>
-          </a:p>
-        </p:txBody>
-      </p:sp>
-      <p:sp>
-        <p:nvSpPr>
-          <p:cNvPr id="7" name="Date Placeholder 6"/>
-          <p:cNvSpPr>
-            <a:spLocks noGrp="1"/>
-          </p:cNvSpPr>
-          <p:nvPr>
-            <p:ph type="dt" sz="half" idx="10"/>
-          </p:nvPr>
-        </p:nvSpPr>
-        <p:spPr/>
-        <p:txBody>
-          <a:bodyPr/>
-          <a:lstStyle/>
-          <a:p>
-            <a:fld id="{5BCAD085-E8A6-8845-BD4E-CB4CCA059FC4}" type="datetimeFigureOut">
-              <a:rPr lang="en-US" smtClean="0"/>
-              <a:t>1/27/13</a:t>
+              <a:t>10/30/2023</a:t>
             </a:fld>
             <a:endParaRPr lang="en-US"/>
           </a:p>
@@ -1772,7 +1834,13 @@
       </p:sp>
       <p:sp>
         <p:nvSpPr>
-          <p:cNvPr id="8" name="Footer Placeholder 7"/>
+          <p:cNvPr id="8" name="Footer Placeholder 7">
+            <a:extLst>
+              <a:ext uri="{FF2B5EF4-FFF2-40B4-BE49-F238E27FC236}">
+                <a16:creationId xmlns:a16="http://schemas.microsoft.com/office/drawing/2014/main" id="{2BFEE921-E2F8-8669-8A92-C2D833BB102F}"/>
+              </a:ext>
+            </a:extLst>
+          </p:cNvPr>
           <p:cNvSpPr>
             <a:spLocks noGrp="1"/>
           </p:cNvSpPr>
@@ -1791,7 +1859,13 @@
       </p:sp>
       <p:sp>
         <p:nvSpPr>
-          <p:cNvPr id="9" name="Slide Number Placeholder 8"/>
+          <p:cNvPr id="9" name="Slide Number Placeholder 8">
+            <a:extLst>
+              <a:ext uri="{FF2B5EF4-FFF2-40B4-BE49-F238E27FC236}">
+                <a16:creationId xmlns:a16="http://schemas.microsoft.com/office/drawing/2014/main" id="{68E0EEAD-925F-FCDD-D0DB-2D6FD9DD709A}"/>
+              </a:ext>
+            </a:extLst>
+          </p:cNvPr>
           <p:cNvSpPr>
             <a:spLocks noGrp="1"/>
           </p:cNvSpPr>
@@ -1804,7 +1878,7 @@
           <a:bodyPr/>
           <a:lstStyle/>
           <a:p>
-            <a:fld id="{C1FF6DA9-008F-8B48-92A6-B652298478BF}" type="slidenum">
+            <a:fld id="{39D2B1DD-CD0E-4D8F-8F2D-CD486A006DF6}" type="slidenum">
               <a:rPr lang="en-US" smtClean="0"/>
               <a:t>‹#›</a:t>
             </a:fld>
@@ -1815,7 +1889,7 @@
     </p:spTree>
     <p:extLst>
       <p:ext uri="{BB962C8B-B14F-4D97-AF65-F5344CB8AC3E}">
-        <p14:creationId xmlns:p14="http://schemas.microsoft.com/office/powerpoint/2010/main" val="990158736"/>
+        <p14:creationId xmlns:p14="http://schemas.microsoft.com/office/powerpoint/2010/main" val="733467960"/>
       </p:ext>
     </p:extLst>
   </p:cSld>
@@ -1844,7 +1918,13 @@
       </p:grpSpPr>
       <p:sp>
         <p:nvSpPr>
-          <p:cNvPr id="2" name="Title 1"/>
+          <p:cNvPr id="2" name="Title 1">
+            <a:extLst>
+              <a:ext uri="{FF2B5EF4-FFF2-40B4-BE49-F238E27FC236}">
+                <a16:creationId xmlns:a16="http://schemas.microsoft.com/office/drawing/2014/main" id="{88793EB0-D5A2-B6D1-0039-9CCB53F3CFD3}"/>
+              </a:ext>
+            </a:extLst>
+          </p:cNvPr>
           <p:cNvSpPr>
             <a:spLocks noGrp="1"/>
           </p:cNvSpPr>
@@ -1858,31 +1938,36 @@
           <a:lstStyle/>
           <a:p>
             <a:r>
+              <a:rPr lang="en-US"/>
+              <a:t>Click to edit Master title style</a:t>
+            </a:r>
+          </a:p>
+        </p:txBody>
+      </p:sp>
+      <p:sp>
+        <p:nvSpPr>
+          <p:cNvPr id="3" name="Date Placeholder 2">
+            <a:extLst>
+              <a:ext uri="{FF2B5EF4-FFF2-40B4-BE49-F238E27FC236}">
+                <a16:creationId xmlns:a16="http://schemas.microsoft.com/office/drawing/2014/main" id="{AB597FF2-99B9-095C-B34B-093CCBE66029}"/>
+              </a:ext>
+            </a:extLst>
+          </p:cNvPr>
+          <p:cNvSpPr>
+            <a:spLocks noGrp="1"/>
+          </p:cNvSpPr>
+          <p:nvPr>
+            <p:ph type="dt" sz="half" idx="10"/>
+          </p:nvPr>
+        </p:nvSpPr>
+        <p:spPr/>
+        <p:txBody>
+          <a:bodyPr/>
+          <a:lstStyle/>
+          <a:p>
+            <a:fld id="{DE25E60F-0558-4F08-8A9F-A8C7708DFBAC}" type="datetimeFigureOut">
               <a:rPr lang="en-US" smtClean="0"/>
-              <a:t>Click to edit Master title style</a:t>
-            </a:r>
-            <a:endParaRPr lang="en-US"/>
-          </a:p>
-        </p:txBody>
-      </p:sp>
-      <p:sp>
-        <p:nvSpPr>
-          <p:cNvPr id="3" name="Date Placeholder 2"/>
-          <p:cNvSpPr>
-            <a:spLocks noGrp="1"/>
-          </p:cNvSpPr>
-          <p:nvPr>
-            <p:ph type="dt" sz="half" idx="10"/>
-          </p:nvPr>
-        </p:nvSpPr>
-        <p:spPr/>
-        <p:txBody>
-          <a:bodyPr/>
-          <a:lstStyle/>
-          <a:p>
-            <a:fld id="{5BCAD085-E8A6-8845-BD4E-CB4CCA059FC4}" type="datetimeFigureOut">
-              <a:rPr lang="en-US" smtClean="0"/>
-              <a:t>1/27/13</a:t>
+              <a:t>10/30/2023</a:t>
             </a:fld>
             <a:endParaRPr lang="en-US"/>
           </a:p>
@@ -1890,7 +1975,13 @@
       </p:sp>
       <p:sp>
         <p:nvSpPr>
-          <p:cNvPr id="4" name="Footer Placeholder 3"/>
+          <p:cNvPr id="4" name="Footer Placeholder 3">
+            <a:extLst>
+              <a:ext uri="{FF2B5EF4-FFF2-40B4-BE49-F238E27FC236}">
+                <a16:creationId xmlns:a16="http://schemas.microsoft.com/office/drawing/2014/main" id="{7690FBB6-E91C-0246-F0E1-1061ADCBAABC}"/>
+              </a:ext>
+            </a:extLst>
+          </p:cNvPr>
           <p:cNvSpPr>
             <a:spLocks noGrp="1"/>
           </p:cNvSpPr>
@@ -1909,7 +2000,13 @@
       </p:sp>
       <p:sp>
         <p:nvSpPr>
-          <p:cNvPr id="5" name="Slide Number Placeholder 4"/>
+          <p:cNvPr id="5" name="Slide Number Placeholder 4">
+            <a:extLst>
+              <a:ext uri="{FF2B5EF4-FFF2-40B4-BE49-F238E27FC236}">
+                <a16:creationId xmlns:a16="http://schemas.microsoft.com/office/drawing/2014/main" id="{5D981309-5EA2-FB70-FC18-39DC302DAE87}"/>
+              </a:ext>
+            </a:extLst>
+          </p:cNvPr>
           <p:cNvSpPr>
             <a:spLocks noGrp="1"/>
           </p:cNvSpPr>
@@ -1922,7 +2019,7 @@
           <a:bodyPr/>
           <a:lstStyle/>
           <a:p>
-            <a:fld id="{C1FF6DA9-008F-8B48-92A6-B652298478BF}" type="slidenum">
+            <a:fld id="{39D2B1DD-CD0E-4D8F-8F2D-CD486A006DF6}" type="slidenum">
               <a:rPr lang="en-US" smtClean="0"/>
               <a:t>‹#›</a:t>
             </a:fld>
@@ -1933,7 +2030,7 @@
     </p:spTree>
     <p:extLst>
       <p:ext uri="{BB962C8B-B14F-4D97-AF65-F5344CB8AC3E}">
-        <p14:creationId xmlns:p14="http://schemas.microsoft.com/office/powerpoint/2010/main" val="727027711"/>
+        <p14:creationId xmlns:p14="http://schemas.microsoft.com/office/powerpoint/2010/main" val="1957655629"/>
       </p:ext>
     </p:extLst>
   </p:cSld>
@@ -1962,7 +2059,13 @@
       </p:grpSpPr>
       <p:sp>
         <p:nvSpPr>
-          <p:cNvPr id="2" name="Date Placeholder 1"/>
+          <p:cNvPr id="2" name="Date Placeholder 1">
+            <a:extLst>
+              <a:ext uri="{FF2B5EF4-FFF2-40B4-BE49-F238E27FC236}">
+                <a16:creationId xmlns:a16="http://schemas.microsoft.com/office/drawing/2014/main" id="{98C4DE0A-4774-8B77-9C2D-6C6FA4EA0A88}"/>
+              </a:ext>
+            </a:extLst>
+          </p:cNvPr>
           <p:cNvSpPr>
             <a:spLocks noGrp="1"/>
           </p:cNvSpPr>
@@ -1975,9 +2078,9 @@
           <a:bodyPr/>
           <a:lstStyle/>
           <a:p>
-            <a:fld id="{5BCAD085-E8A6-8845-BD4E-CB4CCA059FC4}" type="datetimeFigureOut">
+            <a:fld id="{DE25E60F-0558-4F08-8A9F-A8C7708DFBAC}" type="datetimeFigureOut">
               <a:rPr lang="en-US" smtClean="0"/>
-              <a:t>1/27/13</a:t>
+              <a:t>10/30/2023</a:t>
             </a:fld>
             <a:endParaRPr lang="en-US"/>
           </a:p>
@@ -1985,7 +2088,13 @@
       </p:sp>
       <p:sp>
         <p:nvSpPr>
-          <p:cNvPr id="3" name="Footer Placeholder 2"/>
+          <p:cNvPr id="3" name="Footer Placeholder 2">
+            <a:extLst>
+              <a:ext uri="{FF2B5EF4-FFF2-40B4-BE49-F238E27FC236}">
+                <a16:creationId xmlns:a16="http://schemas.microsoft.com/office/drawing/2014/main" id="{F68D11D9-69CB-839C-F452-8049F54AB838}"/>
+              </a:ext>
+            </a:extLst>
+          </p:cNvPr>
           <p:cNvSpPr>
             <a:spLocks noGrp="1"/>
           </p:cNvSpPr>
@@ -2004,7 +2113,13 @@
       </p:sp>
       <p:sp>
         <p:nvSpPr>
-          <p:cNvPr id="4" name="Slide Number Placeholder 3"/>
+          <p:cNvPr id="4" name="Slide Number Placeholder 3">
+            <a:extLst>
+              <a:ext uri="{FF2B5EF4-FFF2-40B4-BE49-F238E27FC236}">
+                <a16:creationId xmlns:a16="http://schemas.microsoft.com/office/drawing/2014/main" id="{C6F0D91D-ACD7-C749-279F-61CE96CE491E}"/>
+              </a:ext>
+            </a:extLst>
+          </p:cNvPr>
           <p:cNvSpPr>
             <a:spLocks noGrp="1"/>
           </p:cNvSpPr>
@@ -2017,7 +2132,7 @@
           <a:bodyPr/>
           <a:lstStyle/>
           <a:p>
-            <a:fld id="{C1FF6DA9-008F-8B48-92A6-B652298478BF}" type="slidenum">
+            <a:fld id="{39D2B1DD-CD0E-4D8F-8F2D-CD486A006DF6}" type="slidenum">
               <a:rPr lang="en-US" smtClean="0"/>
               <a:t>‹#›</a:t>
             </a:fld>
@@ -2028,7 +2143,7 @@
     </p:spTree>
     <p:extLst>
       <p:ext uri="{BB962C8B-B14F-4D97-AF65-F5344CB8AC3E}">
-        <p14:creationId xmlns:p14="http://schemas.microsoft.com/office/powerpoint/2010/main" val="1212999818"/>
+        <p14:creationId xmlns:p14="http://schemas.microsoft.com/office/powerpoint/2010/main" val="2628740853"/>
       </p:ext>
     </p:extLst>
   </p:cSld>
@@ -2057,7 +2172,13 @@
       </p:grpSpPr>
       <p:sp>
         <p:nvSpPr>
-          <p:cNvPr id="2" name="Title 1"/>
+          <p:cNvPr id="2" name="Title 1">
+            <a:extLst>
+              <a:ext uri="{FF2B5EF4-FFF2-40B4-BE49-F238E27FC236}">
+                <a16:creationId xmlns:a16="http://schemas.microsoft.com/office/drawing/2014/main" id="{47819CE3-543A-BF4E-54EF-DD1689F4BB40}"/>
+              </a:ext>
+            </a:extLst>
+          </p:cNvPr>
           <p:cNvSpPr>
             <a:spLocks noGrp="1"/>
           </p:cNvSpPr>
@@ -2067,29 +2188,34 @@
         </p:nvSpPr>
         <p:spPr>
           <a:xfrm>
-            <a:off x="457200" y="273050"/>
-            <a:ext cx="3008313" cy="1162050"/>
+            <a:off x="839788" y="457200"/>
+            <a:ext cx="3932237" cy="1600200"/>
           </a:xfrm>
         </p:spPr>
         <p:txBody>
           <a:bodyPr anchor="b"/>
           <a:lstStyle>
-            <a:lvl1pPr algn="l">
-              <a:defRPr sz="2000" b="1"/>
+            <a:lvl1pPr>
+              <a:defRPr sz="3200"/>
             </a:lvl1pPr>
           </a:lstStyle>
           <a:p>
             <a:r>
-              <a:rPr lang="en-US" smtClean="0"/>
+              <a:rPr lang="en-US"/>
               <a:t>Click to edit Master title style</a:t>
             </a:r>
-            <a:endParaRPr lang="en-US"/>
-          </a:p>
-        </p:txBody>
-      </p:sp>
-      <p:sp>
-        <p:nvSpPr>
-          <p:cNvPr id="3" name="Content Placeholder 2"/>
+          </a:p>
+        </p:txBody>
+      </p:sp>
+      <p:sp>
+        <p:nvSpPr>
+          <p:cNvPr id="3" name="Content Placeholder 2">
+            <a:extLst>
+              <a:ext uri="{FF2B5EF4-FFF2-40B4-BE49-F238E27FC236}">
+                <a16:creationId xmlns:a16="http://schemas.microsoft.com/office/drawing/2014/main" id="{AF0B8F4C-3B44-0B37-C7D4-24B701ECCDCE}"/>
+              </a:ext>
+            </a:extLst>
+          </p:cNvPr>
           <p:cNvSpPr>
             <a:spLocks noGrp="1"/>
           </p:cNvSpPr>
@@ -2099,8 +2225,8 @@
         </p:nvSpPr>
         <p:spPr>
           <a:xfrm>
-            <a:off x="3575050" y="273050"/>
-            <a:ext cx="5111750" cy="5853113"/>
+            <a:off x="5183188" y="987425"/>
+            <a:ext cx="6172200" cy="4873625"/>
           </a:xfrm>
         </p:spPr>
         <p:txBody>
@@ -2137,44 +2263,49 @@
           <a:p>
             <a:pPr lvl="0"/>
             <a:r>
-              <a:rPr lang="en-US" smtClean="0"/>
+              <a:rPr lang="en-US"/>
               <a:t>Click to edit Master text styles</a:t>
             </a:r>
           </a:p>
           <a:p>
             <a:pPr lvl="1"/>
             <a:r>
-              <a:rPr lang="en-US" smtClean="0"/>
+              <a:rPr lang="en-US"/>
               <a:t>Second level</a:t>
             </a:r>
           </a:p>
           <a:p>
             <a:pPr lvl="2"/>
             <a:r>
-              <a:rPr lang="en-US" smtClean="0"/>
+              <a:rPr lang="en-US"/>
               <a:t>Third level</a:t>
             </a:r>
           </a:p>
           <a:p>
             <a:pPr lvl="3"/>
             <a:r>
-              <a:rPr lang="en-US" smtClean="0"/>
+              <a:rPr lang="en-US"/>
               <a:t>Fourth level</a:t>
             </a:r>
           </a:p>
           <a:p>
             <a:pPr lvl="4"/>
             <a:r>
-              <a:rPr lang="en-US" smtClean="0"/>
+              <a:rPr lang="en-US"/>
               <a:t>Fifth level</a:t>
             </a:r>
-            <a:endParaRPr lang="en-US"/>
-          </a:p>
-        </p:txBody>
-      </p:sp>
-      <p:sp>
-        <p:nvSpPr>
-          <p:cNvPr id="4" name="Text Placeholder 3"/>
+          </a:p>
+        </p:txBody>
+      </p:sp>
+      <p:sp>
+        <p:nvSpPr>
+          <p:cNvPr id="4" name="Text Placeholder 3">
+            <a:extLst>
+              <a:ext uri="{FF2B5EF4-FFF2-40B4-BE49-F238E27FC236}">
+                <a16:creationId xmlns:a16="http://schemas.microsoft.com/office/drawing/2014/main" id="{880EC6BB-0284-5B2A-8A73-DDB78C819111}"/>
+              </a:ext>
+            </a:extLst>
+          </p:cNvPr>
           <p:cNvSpPr>
             <a:spLocks noGrp="1"/>
           </p:cNvSpPr>
@@ -2184,8 +2315,8 @@
         </p:nvSpPr>
         <p:spPr>
           <a:xfrm>
-            <a:off x="457200" y="1435100"/>
-            <a:ext cx="3008313" cy="4691063"/>
+            <a:off x="839788" y="2057400"/>
+            <a:ext cx="3932237" cy="3811588"/>
           </a:xfrm>
         </p:spPr>
         <p:txBody>
@@ -2193,68 +2324,74 @@
           <a:lstStyle>
             <a:lvl1pPr marL="0" indent="0">
               <a:buNone/>
-              <a:defRPr sz="1400"/>
+              <a:defRPr sz="1600"/>
             </a:lvl1pPr>
             <a:lvl2pPr marL="457200" indent="0">
               <a:buNone/>
-              <a:defRPr sz="1200"/>
+              <a:defRPr sz="1400"/>
             </a:lvl2pPr>
             <a:lvl3pPr marL="914400" indent="0">
               <a:buNone/>
-              <a:defRPr sz="1000"/>
+              <a:defRPr sz="1200"/>
             </a:lvl3pPr>
             <a:lvl4pPr marL="1371600" indent="0">
               <a:buNone/>
-              <a:defRPr sz="900"/>
+              <a:defRPr sz="1000"/>
             </a:lvl4pPr>
             <a:lvl5pPr marL="1828800" indent="0">
               <a:buNone/>
-              <a:defRPr sz="900"/>
+              <a:defRPr sz="1000"/>
             </a:lvl5pPr>
             <a:lvl6pPr marL="2286000" indent="0">
               <a:buNone/>
-              <a:defRPr sz="900"/>
+              <a:defRPr sz="1000"/>
             </a:lvl6pPr>
             <a:lvl7pPr marL="2743200" indent="0">
               <a:buNone/>
-              <a:defRPr sz="900"/>
+              <a:defRPr sz="1000"/>
             </a:lvl7pPr>
             <a:lvl8pPr marL="3200400" indent="0">
               <a:buNone/>
-              <a:defRPr sz="900"/>
+              <a:defRPr sz="1000"/>
             </a:lvl8pPr>
             <a:lvl9pPr marL="3657600" indent="0">
               <a:buNone/>
-              <a:defRPr sz="900"/>
+              <a:defRPr sz="1000"/>
             </a:lvl9pPr>
           </a:lstStyle>
           <a:p>
             <a:pPr lvl="0"/>
             <a:r>
+              <a:rPr lang="en-US"/>
+              <a:t>Click to edit Master text styles</a:t>
+            </a:r>
+          </a:p>
+        </p:txBody>
+      </p:sp>
+      <p:sp>
+        <p:nvSpPr>
+          <p:cNvPr id="5" name="Date Placeholder 4">
+            <a:extLst>
+              <a:ext uri="{FF2B5EF4-FFF2-40B4-BE49-F238E27FC236}">
+                <a16:creationId xmlns:a16="http://schemas.microsoft.com/office/drawing/2014/main" id="{AA4E9850-F936-4086-2F6E-9D7DF3303B23}"/>
+              </a:ext>
+            </a:extLst>
+          </p:cNvPr>
+          <p:cNvSpPr>
+            <a:spLocks noGrp="1"/>
+          </p:cNvSpPr>
+          <p:nvPr>
+            <p:ph type="dt" sz="half" idx="10"/>
+          </p:nvPr>
+        </p:nvSpPr>
+        <p:spPr/>
+        <p:txBody>
+          <a:bodyPr/>
+          <a:lstStyle/>
+          <a:p>
+            <a:fld id="{DE25E60F-0558-4F08-8A9F-A8C7708DFBAC}" type="datetimeFigureOut">
               <a:rPr lang="en-US" smtClean="0"/>
-              <a:t>Click to edit Master text styles</a:t>
-            </a:r>
-          </a:p>
-        </p:txBody>
-      </p:sp>
-      <p:sp>
-        <p:nvSpPr>
-          <p:cNvPr id="5" name="Date Placeholder 4"/>
-          <p:cNvSpPr>
-            <a:spLocks noGrp="1"/>
-          </p:cNvSpPr>
-          <p:nvPr>
-            <p:ph type="dt" sz="half" idx="10"/>
-          </p:nvPr>
-        </p:nvSpPr>
-        <p:spPr/>
-        <p:txBody>
-          <a:bodyPr/>
-          <a:lstStyle/>
-          <a:p>
-            <a:fld id="{5BCAD085-E8A6-8845-BD4E-CB4CCA059FC4}" type="datetimeFigureOut">
-              <a:rPr lang="en-US" smtClean="0"/>
-              <a:t>1/27/13</a:t>
+              <a:t>10/30/2023</a:t>
             </a:fld>
             <a:endParaRPr lang="en-US"/>
           </a:p>
@@ -2262,7 +2399,13 @@
       </p:sp>
       <p:sp>
         <p:nvSpPr>
-          <p:cNvPr id="6" name="Footer Placeholder 5"/>
+          <p:cNvPr id="6" name="Footer Placeholder 5">
+            <a:extLst>
+              <a:ext uri="{FF2B5EF4-FFF2-40B4-BE49-F238E27FC236}">
+                <a16:creationId xmlns:a16="http://schemas.microsoft.com/office/drawing/2014/main" id="{53DF280D-1310-1F8C-A5E9-E0A5F8279967}"/>
+              </a:ext>
+            </a:extLst>
+          </p:cNvPr>
           <p:cNvSpPr>
             <a:spLocks noGrp="1"/>
           </p:cNvSpPr>
@@ -2281,7 +2424,13 @@
       </p:sp>
       <p:sp>
         <p:nvSpPr>
-          <p:cNvPr id="7" name="Slide Number Placeholder 6"/>
+          <p:cNvPr id="7" name="Slide Number Placeholder 6">
+            <a:extLst>
+              <a:ext uri="{FF2B5EF4-FFF2-40B4-BE49-F238E27FC236}">
+                <a16:creationId xmlns:a16="http://schemas.microsoft.com/office/drawing/2014/main" id="{3B2CE06E-4786-18B6-E437-F7A8609CE53A}"/>
+              </a:ext>
+            </a:extLst>
+          </p:cNvPr>
           <p:cNvSpPr>
             <a:spLocks noGrp="1"/>
           </p:cNvSpPr>
@@ -2294,7 +2443,7 @@
           <a:bodyPr/>
           <a:lstStyle/>
           <a:p>
-            <a:fld id="{C1FF6DA9-008F-8B48-92A6-B652298478BF}" type="slidenum">
+            <a:fld id="{39D2B1DD-CD0E-4D8F-8F2D-CD486A006DF6}" type="slidenum">
               <a:rPr lang="en-US" smtClean="0"/>
               <a:t>‹#›</a:t>
             </a:fld>
@@ -2305,7 +2454,7 @@
     </p:spTree>
     <p:extLst>
       <p:ext uri="{BB962C8B-B14F-4D97-AF65-F5344CB8AC3E}">
-        <p14:creationId xmlns:p14="http://schemas.microsoft.com/office/powerpoint/2010/main" val="1840726560"/>
+        <p14:creationId xmlns:p14="http://schemas.microsoft.com/office/powerpoint/2010/main" val="223910222"/>
       </p:ext>
     </p:extLst>
   </p:cSld>
@@ -2334,7 +2483,13 @@
       </p:grpSpPr>
       <p:sp>
         <p:nvSpPr>
-          <p:cNvPr id="2" name="Title 1"/>
+          <p:cNvPr id="2" name="Title 1">
+            <a:extLst>
+              <a:ext uri="{FF2B5EF4-FFF2-40B4-BE49-F238E27FC236}">
+                <a16:creationId xmlns:a16="http://schemas.microsoft.com/office/drawing/2014/main" id="{2AF213A6-545A-2581-D684-F265FE4BA544}"/>
+              </a:ext>
+            </a:extLst>
+          </p:cNvPr>
           <p:cNvSpPr>
             <a:spLocks noGrp="1"/>
           </p:cNvSpPr>
@@ -2344,29 +2499,34 @@
         </p:nvSpPr>
         <p:spPr>
           <a:xfrm>
-            <a:off x="1792288" y="4800600"/>
-            <a:ext cx="5486400" cy="566738"/>
+            <a:off x="839788" y="457200"/>
+            <a:ext cx="3932237" cy="1600200"/>
           </a:xfrm>
         </p:spPr>
         <p:txBody>
           <a:bodyPr anchor="b"/>
           <a:lstStyle>
-            <a:lvl1pPr algn="l">
-              <a:defRPr sz="2000" b="1"/>
+            <a:lvl1pPr>
+              <a:defRPr sz="3200"/>
             </a:lvl1pPr>
           </a:lstStyle>
           <a:p>
             <a:r>
-              <a:rPr lang="en-US" smtClean="0"/>
+              <a:rPr lang="en-US"/>
               <a:t>Click to edit Master title style</a:t>
             </a:r>
-            <a:endParaRPr lang="en-US"/>
-          </a:p>
-        </p:txBody>
-      </p:sp>
-      <p:sp>
-        <p:nvSpPr>
-          <p:cNvPr id="3" name="Picture Placeholder 2"/>
+          </a:p>
+        </p:txBody>
+      </p:sp>
+      <p:sp>
+        <p:nvSpPr>
+          <p:cNvPr id="3" name="Picture Placeholder 2">
+            <a:extLst>
+              <a:ext uri="{FF2B5EF4-FFF2-40B4-BE49-F238E27FC236}">
+                <a16:creationId xmlns:a16="http://schemas.microsoft.com/office/drawing/2014/main" id="{6DCAD9A3-FC42-15B5-57C1-4DE7BBDC4B24}"/>
+              </a:ext>
+            </a:extLst>
+          </p:cNvPr>
           <p:cNvSpPr>
             <a:spLocks noGrp="1"/>
           </p:cNvSpPr>
@@ -2376,8 +2536,8 @@
         </p:nvSpPr>
         <p:spPr>
           <a:xfrm>
-            <a:off x="1792288" y="612775"/>
-            <a:ext cx="5486400" cy="4114800"/>
+            <a:off x="5183188" y="987425"/>
+            <a:ext cx="6172200" cy="4873625"/>
           </a:xfrm>
         </p:spPr>
         <p:txBody>
@@ -2427,7 +2587,13 @@
       </p:sp>
       <p:sp>
         <p:nvSpPr>
-          <p:cNvPr id="4" name="Text Placeholder 3"/>
+          <p:cNvPr id="4" name="Text Placeholder 3">
+            <a:extLst>
+              <a:ext uri="{FF2B5EF4-FFF2-40B4-BE49-F238E27FC236}">
+                <a16:creationId xmlns:a16="http://schemas.microsoft.com/office/drawing/2014/main" id="{7844BD9D-C65E-CC48-7EF3-77C0F9BD7E75}"/>
+              </a:ext>
+            </a:extLst>
+          </p:cNvPr>
           <p:cNvSpPr>
             <a:spLocks noGrp="1"/>
           </p:cNvSpPr>
@@ -2437,8 +2603,8 @@
         </p:nvSpPr>
         <p:spPr>
           <a:xfrm>
-            <a:off x="1792288" y="5367338"/>
-            <a:ext cx="5486400" cy="804862"/>
+            <a:off x="839788" y="2057400"/>
+            <a:ext cx="3932237" cy="3811588"/>
           </a:xfrm>
         </p:spPr>
         <p:txBody>
@@ -2446,68 +2612,74 @@
           <a:lstStyle>
             <a:lvl1pPr marL="0" indent="0">
               <a:buNone/>
-              <a:defRPr sz="1400"/>
+              <a:defRPr sz="1600"/>
             </a:lvl1pPr>
             <a:lvl2pPr marL="457200" indent="0">
               <a:buNone/>
-              <a:defRPr sz="1200"/>
+              <a:defRPr sz="1400"/>
             </a:lvl2pPr>
             <a:lvl3pPr marL="914400" indent="0">
               <a:buNone/>
-              <a:defRPr sz="1000"/>
+              <a:defRPr sz="1200"/>
             </a:lvl3pPr>
             <a:lvl4pPr marL="1371600" indent="0">
               <a:buNone/>
-              <a:defRPr sz="900"/>
+              <a:defRPr sz="1000"/>
             </a:lvl4pPr>
             <a:lvl5pPr marL="1828800" indent="0">
               <a:buNone/>
-              <a:defRPr sz="900"/>
+              <a:defRPr sz="1000"/>
             </a:lvl5pPr>
             <a:lvl6pPr marL="2286000" indent="0">
               <a:buNone/>
-              <a:defRPr sz="900"/>
+              <a:defRPr sz="1000"/>
             </a:lvl6pPr>
             <a:lvl7pPr marL="2743200" indent="0">
               <a:buNone/>
-              <a:defRPr sz="900"/>
+              <a:defRPr sz="1000"/>
             </a:lvl7pPr>
             <a:lvl8pPr marL="3200400" indent="0">
               <a:buNone/>
-              <a:defRPr sz="900"/>
+              <a:defRPr sz="1000"/>
             </a:lvl8pPr>
             <a:lvl9pPr marL="3657600" indent="0">
               <a:buNone/>
-              <a:defRPr sz="900"/>
+              <a:defRPr sz="1000"/>
             </a:lvl9pPr>
           </a:lstStyle>
           <a:p>
             <a:pPr lvl="0"/>
             <a:r>
+              <a:rPr lang="en-US"/>
+              <a:t>Click to edit Master text styles</a:t>
+            </a:r>
+          </a:p>
+        </p:txBody>
+      </p:sp>
+      <p:sp>
+        <p:nvSpPr>
+          <p:cNvPr id="5" name="Date Placeholder 4">
+            <a:extLst>
+              <a:ext uri="{FF2B5EF4-FFF2-40B4-BE49-F238E27FC236}">
+                <a16:creationId xmlns:a16="http://schemas.microsoft.com/office/drawing/2014/main" id="{0F2EECAE-A372-385F-C5B6-707AC8A8F0DD}"/>
+              </a:ext>
+            </a:extLst>
+          </p:cNvPr>
+          <p:cNvSpPr>
+            <a:spLocks noGrp="1"/>
+          </p:cNvSpPr>
+          <p:nvPr>
+            <p:ph type="dt" sz="half" idx="10"/>
+          </p:nvPr>
+        </p:nvSpPr>
+        <p:spPr/>
+        <p:txBody>
+          <a:bodyPr/>
+          <a:lstStyle/>
+          <a:p>
+            <a:fld id="{DE25E60F-0558-4F08-8A9F-A8C7708DFBAC}" type="datetimeFigureOut">
               <a:rPr lang="en-US" smtClean="0"/>
-              <a:t>Click to edit Master text styles</a:t>
-            </a:r>
-          </a:p>
-        </p:txBody>
-      </p:sp>
-      <p:sp>
-        <p:nvSpPr>
-          <p:cNvPr id="5" name="Date Placeholder 4"/>
-          <p:cNvSpPr>
-            <a:spLocks noGrp="1"/>
-          </p:cNvSpPr>
-          <p:nvPr>
-            <p:ph type="dt" sz="half" idx="10"/>
-          </p:nvPr>
-        </p:nvSpPr>
-        <p:spPr/>
-        <p:txBody>
-          <a:bodyPr/>
-          <a:lstStyle/>
-          <a:p>
-            <a:fld id="{5BCAD085-E8A6-8845-BD4E-CB4CCA059FC4}" type="datetimeFigureOut">
-              <a:rPr lang="en-US" smtClean="0"/>
-              <a:t>1/27/13</a:t>
+              <a:t>10/30/2023</a:t>
             </a:fld>
             <a:endParaRPr lang="en-US"/>
           </a:p>
@@ -2515,7 +2687,13 @@
       </p:sp>
       <p:sp>
         <p:nvSpPr>
-          <p:cNvPr id="6" name="Footer Placeholder 5"/>
+          <p:cNvPr id="6" name="Footer Placeholder 5">
+            <a:extLst>
+              <a:ext uri="{FF2B5EF4-FFF2-40B4-BE49-F238E27FC236}">
+                <a16:creationId xmlns:a16="http://schemas.microsoft.com/office/drawing/2014/main" id="{94398295-4F4D-8ADD-3EEC-5F9517F7E85E}"/>
+              </a:ext>
+            </a:extLst>
+          </p:cNvPr>
           <p:cNvSpPr>
             <a:spLocks noGrp="1"/>
           </p:cNvSpPr>
@@ -2534,7 +2712,13 @@
       </p:sp>
       <p:sp>
         <p:nvSpPr>
-          <p:cNvPr id="7" name="Slide Number Placeholder 6"/>
+          <p:cNvPr id="7" name="Slide Number Placeholder 6">
+            <a:extLst>
+              <a:ext uri="{FF2B5EF4-FFF2-40B4-BE49-F238E27FC236}">
+                <a16:creationId xmlns:a16="http://schemas.microsoft.com/office/drawing/2014/main" id="{51567060-8E24-231D-C5C5-F23978CD9A44}"/>
+              </a:ext>
+            </a:extLst>
+          </p:cNvPr>
           <p:cNvSpPr>
             <a:spLocks noGrp="1"/>
           </p:cNvSpPr>
@@ -2547,7 +2731,7 @@
           <a:bodyPr/>
           <a:lstStyle/>
           <a:p>
-            <a:fld id="{C1FF6DA9-008F-8B48-92A6-B652298478BF}" type="slidenum">
+            <a:fld id="{39D2B1DD-CD0E-4D8F-8F2D-CD486A006DF6}" type="slidenum">
               <a:rPr lang="en-US" smtClean="0"/>
               <a:t>‹#›</a:t>
             </a:fld>
@@ -2558,7 +2742,7 @@
     </p:spTree>
     <p:extLst>
       <p:ext uri="{BB962C8B-B14F-4D97-AF65-F5344CB8AC3E}">
-        <p14:creationId xmlns:p14="http://schemas.microsoft.com/office/powerpoint/2010/main" val="3889236939"/>
+        <p14:creationId xmlns:p14="http://schemas.microsoft.com/office/powerpoint/2010/main" val="3164862224"/>
       </p:ext>
     </p:extLst>
   </p:cSld>
@@ -2592,7 +2776,13 @@
       </p:grpSpPr>
       <p:sp>
         <p:nvSpPr>
-          <p:cNvPr id="2" name="Title Placeholder 1"/>
+          <p:cNvPr id="2" name="Title Placeholder 1">
+            <a:extLst>
+              <a:ext uri="{FF2B5EF4-FFF2-40B4-BE49-F238E27FC236}">
+                <a16:creationId xmlns:a16="http://schemas.microsoft.com/office/drawing/2014/main" id="{61187A59-E909-A7AD-5638-0598271AD2E3}"/>
+              </a:ext>
+            </a:extLst>
+          </p:cNvPr>
           <p:cNvSpPr>
             <a:spLocks noGrp="1"/>
           </p:cNvSpPr>
@@ -2602,8 +2792,8 @@
         </p:nvSpPr>
         <p:spPr>
           <a:xfrm>
-            <a:off x="457200" y="274638"/>
-            <a:ext cx="8229600" cy="1143000"/>
+            <a:off x="838200" y="365125"/>
+            <a:ext cx="10515600" cy="1325563"/>
           </a:xfrm>
           <a:prstGeom prst="rect">
             <a:avLst/>
@@ -2616,16 +2806,21 @@
           <a:lstStyle/>
           <a:p>
             <a:r>
-              <a:rPr lang="en-US" smtClean="0"/>
+              <a:rPr lang="en-US"/>
               <a:t>Click to edit Master title style</a:t>
             </a:r>
-            <a:endParaRPr lang="en-US"/>
-          </a:p>
-        </p:txBody>
-      </p:sp>
-      <p:sp>
-        <p:nvSpPr>
-          <p:cNvPr id="3" name="Text Placeholder 2"/>
+          </a:p>
+        </p:txBody>
+      </p:sp>
+      <p:sp>
+        <p:nvSpPr>
+          <p:cNvPr id="3" name="Text Placeholder 2">
+            <a:extLst>
+              <a:ext uri="{FF2B5EF4-FFF2-40B4-BE49-F238E27FC236}">
+                <a16:creationId xmlns:a16="http://schemas.microsoft.com/office/drawing/2014/main" id="{167E2022-5A09-7D64-7E81-B1E67F72267B}"/>
+              </a:ext>
+            </a:extLst>
+          </p:cNvPr>
           <p:cNvSpPr>
             <a:spLocks noGrp="1"/>
           </p:cNvSpPr>
@@ -2635,8 +2830,8 @@
         </p:nvSpPr>
         <p:spPr>
           <a:xfrm>
-            <a:off x="457200" y="1600200"/>
-            <a:ext cx="8229600" cy="4525963"/>
+            <a:off x="838200" y="1825625"/>
+            <a:ext cx="10515600" cy="4351338"/>
           </a:xfrm>
           <a:prstGeom prst="rect">
             <a:avLst/>
@@ -2650,44 +2845,49 @@
           <a:p>
             <a:pPr lvl="0"/>
             <a:r>
-              <a:rPr lang="en-US" smtClean="0"/>
+              <a:rPr lang="en-US"/>
               <a:t>Click to edit Master text styles</a:t>
             </a:r>
           </a:p>
           <a:p>
             <a:pPr lvl="1"/>
             <a:r>
-              <a:rPr lang="en-US" smtClean="0"/>
+              <a:rPr lang="en-US"/>
               <a:t>Second level</a:t>
             </a:r>
           </a:p>
           <a:p>
             <a:pPr lvl="2"/>
             <a:r>
-              <a:rPr lang="en-US" smtClean="0"/>
+              <a:rPr lang="en-US"/>
               <a:t>Third level</a:t>
             </a:r>
           </a:p>
           <a:p>
             <a:pPr lvl="3"/>
             <a:r>
-              <a:rPr lang="en-US" smtClean="0"/>
+              <a:rPr lang="en-US"/>
               <a:t>Fourth level</a:t>
             </a:r>
           </a:p>
           <a:p>
             <a:pPr lvl="4"/>
             <a:r>
-              <a:rPr lang="en-US" smtClean="0"/>
+              <a:rPr lang="en-US"/>
               <a:t>Fifth level</a:t>
             </a:r>
-            <a:endParaRPr lang="en-US"/>
-          </a:p>
-        </p:txBody>
-      </p:sp>
-      <p:sp>
-        <p:nvSpPr>
-          <p:cNvPr id="4" name="Date Placeholder 3"/>
+          </a:p>
+        </p:txBody>
+      </p:sp>
+      <p:sp>
+        <p:nvSpPr>
+          <p:cNvPr id="4" name="Date Placeholder 3">
+            <a:extLst>
+              <a:ext uri="{FF2B5EF4-FFF2-40B4-BE49-F238E27FC236}">
+                <a16:creationId xmlns:a16="http://schemas.microsoft.com/office/drawing/2014/main" id="{474CF6BB-63CF-2F84-2546-2DC528377E6D}"/>
+              </a:ext>
+            </a:extLst>
+          </p:cNvPr>
           <p:cNvSpPr>
             <a:spLocks noGrp="1"/>
           </p:cNvSpPr>
@@ -2697,8 +2897,8 @@
         </p:nvSpPr>
         <p:spPr>
           <a:xfrm>
-            <a:off x="457200" y="6356350"/>
-            <a:ext cx="2133600" cy="365125"/>
+            <a:off x="838200" y="6356350"/>
+            <a:ext cx="2743200" cy="365125"/>
           </a:xfrm>
           <a:prstGeom prst="rect">
             <a:avLst/>
@@ -2718,9 +2918,9 @@
             </a:lvl1pPr>
           </a:lstStyle>
           <a:p>
-            <a:fld id="{5BCAD085-E8A6-8845-BD4E-CB4CCA059FC4}" type="datetimeFigureOut">
+            <a:fld id="{DE25E60F-0558-4F08-8A9F-A8C7708DFBAC}" type="datetimeFigureOut">
               <a:rPr lang="en-US" smtClean="0"/>
-              <a:t>1/27/13</a:t>
+              <a:t>10/30/2023</a:t>
             </a:fld>
             <a:endParaRPr lang="en-US"/>
           </a:p>
@@ -2728,7 +2928,13 @@
       </p:sp>
       <p:sp>
         <p:nvSpPr>
-          <p:cNvPr id="5" name="Footer Placeholder 4"/>
+          <p:cNvPr id="5" name="Footer Placeholder 4">
+            <a:extLst>
+              <a:ext uri="{FF2B5EF4-FFF2-40B4-BE49-F238E27FC236}">
+                <a16:creationId xmlns:a16="http://schemas.microsoft.com/office/drawing/2014/main" id="{8D3FE0EF-0382-D6A0-0C66-89FC58A19C74}"/>
+              </a:ext>
+            </a:extLst>
+          </p:cNvPr>
           <p:cNvSpPr>
             <a:spLocks noGrp="1"/>
           </p:cNvSpPr>
@@ -2738,8 +2944,8 @@
         </p:nvSpPr>
         <p:spPr>
           <a:xfrm>
-            <a:off x="3124200" y="6356350"/>
-            <a:ext cx="2895600" cy="365125"/>
+            <a:off x="4038600" y="6356350"/>
+            <a:ext cx="4114800" cy="365125"/>
           </a:xfrm>
           <a:prstGeom prst="rect">
             <a:avLst/>
@@ -2765,7 +2971,13 @@
       </p:sp>
       <p:sp>
         <p:nvSpPr>
-          <p:cNvPr id="6" name="Slide Number Placeholder 5"/>
+          <p:cNvPr id="6" name="Slide Number Placeholder 5">
+            <a:extLst>
+              <a:ext uri="{FF2B5EF4-FFF2-40B4-BE49-F238E27FC236}">
+                <a16:creationId xmlns:a16="http://schemas.microsoft.com/office/drawing/2014/main" id="{CC2A0C1D-AD1F-2626-048B-F95F3723A0E9}"/>
+              </a:ext>
+            </a:extLst>
+          </p:cNvPr>
           <p:cNvSpPr>
             <a:spLocks noGrp="1"/>
           </p:cNvSpPr>
@@ -2775,8 +2987,8 @@
         </p:nvSpPr>
         <p:spPr>
           <a:xfrm>
-            <a:off x="6553200" y="6356350"/>
-            <a:ext cx="2133600" cy="365125"/>
+            <a:off x="8610600" y="6356350"/>
+            <a:ext cx="2743200" cy="365125"/>
           </a:xfrm>
           <a:prstGeom prst="rect">
             <a:avLst/>
@@ -2796,7 +3008,7 @@
             </a:lvl1pPr>
           </a:lstStyle>
           <a:p>
-            <a:fld id="{C1FF6DA9-008F-8B48-92A6-B652298478BF}" type="slidenum">
+            <a:fld id="{39D2B1DD-CD0E-4D8F-8F2D-CD486A006DF6}" type="slidenum">
               <a:rPr lang="en-US" smtClean="0"/>
               <a:t>‹#›</a:t>
             </a:fld>
@@ -2807,7 +3019,7 @@
     </p:spTree>
     <p:extLst>
       <p:ext uri="{BB962C8B-B14F-4D97-AF65-F5344CB8AC3E}">
-        <p14:creationId xmlns:p14="http://schemas.microsoft.com/office/powerpoint/2010/main" val="2209977519"/>
+        <p14:creationId xmlns:p14="http://schemas.microsoft.com/office/powerpoint/2010/main" val="1983845484"/>
       </p:ext>
     </p:extLst>
   </p:cSld>
@@ -2827,7 +3039,10 @@
   </p:sldLayoutIdLst>
   <p:txStyles>
     <p:titleStyle>
-      <a:lvl1pPr algn="ctr" defTabSz="457200" rtl="0" eaLnBrk="1" latinLnBrk="0" hangingPunct="1">
+      <a:lvl1pPr algn="l" defTabSz="914400" rtl="0" eaLnBrk="1" latinLnBrk="0" hangingPunct="1">
+        <a:lnSpc>
+          <a:spcPct val="90000"/>
+        </a:lnSpc>
         <a:spcBef>
           <a:spcPct val="0"/>
         </a:spcBef>
@@ -2843,13 +3058,16 @@
       </a:lvl1pPr>
     </p:titleStyle>
     <p:bodyStyle>
-      <a:lvl1pPr marL="342900" indent="-342900" algn="l" defTabSz="457200" rtl="0" eaLnBrk="1" latinLnBrk="0" hangingPunct="1">
+      <a:lvl1pPr marL="228600" indent="-228600" algn="l" defTabSz="914400" rtl="0" eaLnBrk="1" latinLnBrk="0" hangingPunct="1">
+        <a:lnSpc>
+          <a:spcPct val="90000"/>
+        </a:lnSpc>
         <a:spcBef>
-          <a:spcPct val="20000"/>
+          <a:spcPts val="1000"/>
         </a:spcBef>
-        <a:buFont typeface="Arial"/>
+        <a:buFont typeface="Arial" panose="020B0604020202020204" pitchFamily="34" charset="0"/>
         <a:buChar char="•"/>
-        <a:defRPr sz="3200" kern="1200">
+        <a:defRPr sz="2800" kern="1200">
           <a:solidFill>
             <a:schemeClr val="tx1"/>
           </a:solidFill>
@@ -2858,26 +3076,14 @@
           <a:cs typeface="+mn-cs"/>
         </a:defRPr>
       </a:lvl1pPr>
-      <a:lvl2pPr marL="742950" indent="-285750" algn="l" defTabSz="457200" rtl="0" eaLnBrk="1" latinLnBrk="0" hangingPunct="1">
+      <a:lvl2pPr marL="685800" indent="-228600" algn="l" defTabSz="914400" rtl="0" eaLnBrk="1" latinLnBrk="0" hangingPunct="1">
+        <a:lnSpc>
+          <a:spcPct val="90000"/>
+        </a:lnSpc>
         <a:spcBef>
-          <a:spcPct val="20000"/>
+          <a:spcPts val="500"/>
         </a:spcBef>
-        <a:buFont typeface="Arial"/>
-        <a:buChar char="–"/>
-        <a:defRPr sz="2800" kern="1200">
-          <a:solidFill>
-            <a:schemeClr val="tx1"/>
-          </a:solidFill>
-          <a:latin typeface="+mn-lt"/>
-          <a:ea typeface="+mn-ea"/>
-          <a:cs typeface="+mn-cs"/>
-        </a:defRPr>
-      </a:lvl2pPr>
-      <a:lvl3pPr marL="1143000" indent="-228600" algn="l" defTabSz="457200" rtl="0" eaLnBrk="1" latinLnBrk="0" hangingPunct="1">
-        <a:spcBef>
-          <a:spcPct val="20000"/>
-        </a:spcBef>
-        <a:buFont typeface="Arial"/>
+        <a:buFont typeface="Arial" panose="020B0604020202020204" pitchFamily="34" charset="0"/>
         <a:buChar char="•"/>
         <a:defRPr sz="2400" kern="1200">
           <a:solidFill>
@@ -2887,42 +3093,15 @@
           <a:ea typeface="+mn-ea"/>
           <a:cs typeface="+mn-cs"/>
         </a:defRPr>
-      </a:lvl3pPr>
-      <a:lvl4pPr marL="1600200" indent="-228600" algn="l" defTabSz="457200" rtl="0" eaLnBrk="1" latinLnBrk="0" hangingPunct="1">
+      </a:lvl2pPr>
+      <a:lvl3pPr marL="1143000" indent="-228600" algn="l" defTabSz="914400" rtl="0" eaLnBrk="1" latinLnBrk="0" hangingPunct="1">
+        <a:lnSpc>
+          <a:spcPct val="90000"/>
+        </a:lnSpc>
         <a:spcBef>
-          <a:spcPct val="20000"/>
+          <a:spcPts val="500"/>
         </a:spcBef>
-        <a:buFont typeface="Arial"/>
-        <a:buChar char="–"/>
-        <a:defRPr sz="2000" kern="1200">
-          <a:solidFill>
-            <a:schemeClr val="tx1"/>
-          </a:solidFill>
-          <a:latin typeface="+mn-lt"/>
-          <a:ea typeface="+mn-ea"/>
-          <a:cs typeface="+mn-cs"/>
-        </a:defRPr>
-      </a:lvl4pPr>
-      <a:lvl5pPr marL="2057400" indent="-228600" algn="l" defTabSz="457200" rtl="0" eaLnBrk="1" latinLnBrk="0" hangingPunct="1">
-        <a:spcBef>
-          <a:spcPct val="20000"/>
-        </a:spcBef>
-        <a:buFont typeface="Arial"/>
-        <a:buChar char="»"/>
-        <a:defRPr sz="2000" kern="1200">
-          <a:solidFill>
-            <a:schemeClr val="tx1"/>
-          </a:solidFill>
-          <a:latin typeface="+mn-lt"/>
-          <a:ea typeface="+mn-ea"/>
-          <a:cs typeface="+mn-cs"/>
-        </a:defRPr>
-      </a:lvl5pPr>
-      <a:lvl6pPr marL="2514600" indent="-228600" algn="l" defTabSz="457200" rtl="0" eaLnBrk="1" latinLnBrk="0" hangingPunct="1">
-        <a:spcBef>
-          <a:spcPct val="20000"/>
-        </a:spcBef>
-        <a:buFont typeface="Arial"/>
+        <a:buFont typeface="Arial" panose="020B0604020202020204" pitchFamily="34" charset="0"/>
         <a:buChar char="•"/>
         <a:defRPr sz="2000" kern="1200">
           <a:solidFill>
@@ -2932,14 +3111,71 @@
           <a:ea typeface="+mn-ea"/>
           <a:cs typeface="+mn-cs"/>
         </a:defRPr>
+      </a:lvl3pPr>
+      <a:lvl4pPr marL="1600200" indent="-228600" algn="l" defTabSz="914400" rtl="0" eaLnBrk="1" latinLnBrk="0" hangingPunct="1">
+        <a:lnSpc>
+          <a:spcPct val="90000"/>
+        </a:lnSpc>
+        <a:spcBef>
+          <a:spcPts val="500"/>
+        </a:spcBef>
+        <a:buFont typeface="Arial" panose="020B0604020202020204" pitchFamily="34" charset="0"/>
+        <a:buChar char="•"/>
+        <a:defRPr sz="1800" kern="1200">
+          <a:solidFill>
+            <a:schemeClr val="tx1"/>
+          </a:solidFill>
+          <a:latin typeface="+mn-lt"/>
+          <a:ea typeface="+mn-ea"/>
+          <a:cs typeface="+mn-cs"/>
+        </a:defRPr>
+      </a:lvl4pPr>
+      <a:lvl5pPr marL="2057400" indent="-228600" algn="l" defTabSz="914400" rtl="0" eaLnBrk="1" latinLnBrk="0" hangingPunct="1">
+        <a:lnSpc>
+          <a:spcPct val="90000"/>
+        </a:lnSpc>
+        <a:spcBef>
+          <a:spcPts val="500"/>
+        </a:spcBef>
+        <a:buFont typeface="Arial" panose="020B0604020202020204" pitchFamily="34" charset="0"/>
+        <a:buChar char="•"/>
+        <a:defRPr sz="1800" kern="1200">
+          <a:solidFill>
+            <a:schemeClr val="tx1"/>
+          </a:solidFill>
+          <a:latin typeface="+mn-lt"/>
+          <a:ea typeface="+mn-ea"/>
+          <a:cs typeface="+mn-cs"/>
+        </a:defRPr>
+      </a:lvl5pPr>
+      <a:lvl6pPr marL="2514600" indent="-228600" algn="l" defTabSz="914400" rtl="0" eaLnBrk="1" latinLnBrk="0" hangingPunct="1">
+        <a:lnSpc>
+          <a:spcPct val="90000"/>
+        </a:lnSpc>
+        <a:spcBef>
+          <a:spcPts val="500"/>
+        </a:spcBef>
+        <a:buFont typeface="Arial" panose="020B0604020202020204" pitchFamily="34" charset="0"/>
+        <a:buChar char="•"/>
+        <a:defRPr sz="1800" kern="1200">
+          <a:solidFill>
+            <a:schemeClr val="tx1"/>
+          </a:solidFill>
+          <a:latin typeface="+mn-lt"/>
+          <a:ea typeface="+mn-ea"/>
+          <a:cs typeface="+mn-cs"/>
+        </a:defRPr>
       </a:lvl6pPr>
-      <a:lvl7pPr marL="2971800" indent="-228600" algn="l" defTabSz="457200" rtl="0" eaLnBrk="1" latinLnBrk="0" hangingPunct="1">
+      <a:lvl7pPr marL="2971800" indent="-228600" algn="l" defTabSz="914400" rtl="0" eaLnBrk="1" latinLnBrk="0" hangingPunct="1">
+        <a:lnSpc>
+          <a:spcPct val="90000"/>
+        </a:lnSpc>
         <a:spcBef>
-          <a:spcPct val="20000"/>
+          <a:spcPts val="500"/>
         </a:spcBef>
-        <a:buFont typeface="Arial"/>
+        <a:buFont typeface="Arial" panose="020B0604020202020204" pitchFamily="34" charset="0"/>
         <a:buChar char="•"/>
-        <a:defRPr sz="2000" kern="1200">
+        <a:defRPr sz="1800" kern="1200">
           <a:solidFill>
             <a:schemeClr val="tx1"/>
           </a:solidFill>
@@ -2948,13 +3184,16 @@
           <a:cs typeface="+mn-cs"/>
         </a:defRPr>
       </a:lvl7pPr>
-      <a:lvl8pPr marL="3429000" indent="-228600" algn="l" defTabSz="457200" rtl="0" eaLnBrk="1" latinLnBrk="0" hangingPunct="1">
+      <a:lvl8pPr marL="3429000" indent="-228600" algn="l" defTabSz="914400" rtl="0" eaLnBrk="1" latinLnBrk="0" hangingPunct="1">
+        <a:lnSpc>
+          <a:spcPct val="90000"/>
+        </a:lnSpc>
         <a:spcBef>
-          <a:spcPct val="20000"/>
+          <a:spcPts val="500"/>
         </a:spcBef>
-        <a:buFont typeface="Arial"/>
+        <a:buFont typeface="Arial" panose="020B0604020202020204" pitchFamily="34" charset="0"/>
         <a:buChar char="•"/>
-        <a:defRPr sz="2000" kern="1200">
+        <a:defRPr sz="1800" kern="1200">
           <a:solidFill>
             <a:schemeClr val="tx1"/>
           </a:solidFill>
@@ -2963,13 +3202,16 @@
           <a:cs typeface="+mn-cs"/>
         </a:defRPr>
       </a:lvl8pPr>
-      <a:lvl9pPr marL="3886200" indent="-228600" algn="l" defTabSz="457200" rtl="0" eaLnBrk="1" latinLnBrk="0" hangingPunct="1">
+      <a:lvl9pPr marL="3886200" indent="-228600" algn="l" defTabSz="914400" rtl="0" eaLnBrk="1" latinLnBrk="0" hangingPunct="1">
+        <a:lnSpc>
+          <a:spcPct val="90000"/>
+        </a:lnSpc>
         <a:spcBef>
-          <a:spcPct val="20000"/>
+          <a:spcPts val="500"/>
         </a:spcBef>
-        <a:buFont typeface="Arial"/>
+        <a:buFont typeface="Arial" panose="020B0604020202020204" pitchFamily="34" charset="0"/>
         <a:buChar char="•"/>
-        <a:defRPr sz="2000" kern="1200">
+        <a:defRPr sz="1800" kern="1200">
           <a:solidFill>
             <a:schemeClr val="tx1"/>
           </a:solidFill>
@@ -2983,7 +3225,7 @@
       <a:defPPr>
         <a:defRPr lang="en-US"/>
       </a:defPPr>
-      <a:lvl1pPr marL="0" algn="l" defTabSz="457200" rtl="0" eaLnBrk="1" latinLnBrk="0" hangingPunct="1">
+      <a:lvl1pPr marL="0" algn="l" defTabSz="914400" rtl="0" eaLnBrk="1" latinLnBrk="0" hangingPunct="1">
         <a:defRPr sz="1800" kern="1200">
           <a:solidFill>
             <a:schemeClr val="tx1"/>
@@ -2993,7 +3235,7 @@
           <a:cs typeface="+mn-cs"/>
         </a:defRPr>
       </a:lvl1pPr>
-      <a:lvl2pPr marL="457200" algn="l" defTabSz="457200" rtl="0" eaLnBrk="1" latinLnBrk="0" hangingPunct="1">
+      <a:lvl2pPr marL="457200" algn="l" defTabSz="914400" rtl="0" eaLnBrk="1" latinLnBrk="0" hangingPunct="1">
         <a:defRPr sz="1800" kern="1200">
           <a:solidFill>
             <a:schemeClr val="tx1"/>
@@ -3003,7 +3245,7 @@
           <a:cs typeface="+mn-cs"/>
         </a:defRPr>
       </a:lvl2pPr>
-      <a:lvl3pPr marL="914400" algn="l" defTabSz="457200" rtl="0" eaLnBrk="1" latinLnBrk="0" hangingPunct="1">
+      <a:lvl3pPr marL="914400" algn="l" defTabSz="914400" rtl="0" eaLnBrk="1" latinLnBrk="0" hangingPunct="1">
         <a:defRPr sz="1800" kern="1200">
           <a:solidFill>
             <a:schemeClr val="tx1"/>
@@ -3013,7 +3255,7 @@
           <a:cs typeface="+mn-cs"/>
         </a:defRPr>
       </a:lvl3pPr>
-      <a:lvl4pPr marL="1371600" algn="l" defTabSz="457200" rtl="0" eaLnBrk="1" latinLnBrk="0" hangingPunct="1">
+      <a:lvl4pPr marL="1371600" algn="l" defTabSz="914400" rtl="0" eaLnBrk="1" latinLnBrk="0" hangingPunct="1">
         <a:defRPr sz="1800" kern="1200">
           <a:solidFill>
             <a:schemeClr val="tx1"/>
@@ -3023,7 +3265,7 @@
           <a:cs typeface="+mn-cs"/>
         </a:defRPr>
       </a:lvl4pPr>
-      <a:lvl5pPr marL="1828800" algn="l" defTabSz="457200" rtl="0" eaLnBrk="1" latinLnBrk="0" hangingPunct="1">
+      <a:lvl5pPr marL="1828800" algn="l" defTabSz="914400" rtl="0" eaLnBrk="1" latinLnBrk="0" hangingPunct="1">
         <a:defRPr sz="1800" kern="1200">
           <a:solidFill>
             <a:schemeClr val="tx1"/>
@@ -3033,7 +3275,7 @@
           <a:cs typeface="+mn-cs"/>
         </a:defRPr>
       </a:lvl5pPr>
-      <a:lvl6pPr marL="2286000" algn="l" defTabSz="457200" rtl="0" eaLnBrk="1" latinLnBrk="0" hangingPunct="1">
+      <a:lvl6pPr marL="2286000" algn="l" defTabSz="914400" rtl="0" eaLnBrk="1" latinLnBrk="0" hangingPunct="1">
         <a:defRPr sz="1800" kern="1200">
           <a:solidFill>
             <a:schemeClr val="tx1"/>
@@ -3043,7 +3285,7 @@
           <a:cs typeface="+mn-cs"/>
         </a:defRPr>
       </a:lvl6pPr>
-      <a:lvl7pPr marL="2743200" algn="l" defTabSz="457200" rtl="0" eaLnBrk="1" latinLnBrk="0" hangingPunct="1">
+      <a:lvl7pPr marL="2743200" algn="l" defTabSz="914400" rtl="0" eaLnBrk="1" latinLnBrk="0" hangingPunct="1">
         <a:defRPr sz="1800" kern="1200">
           <a:solidFill>
             <a:schemeClr val="tx1"/>
@@ -3053,7 +3295,7 @@
           <a:cs typeface="+mn-cs"/>
         </a:defRPr>
       </a:lvl7pPr>
-      <a:lvl8pPr marL="3200400" algn="l" defTabSz="457200" rtl="0" eaLnBrk="1" latinLnBrk="0" hangingPunct="1">
+      <a:lvl8pPr marL="3200400" algn="l" defTabSz="914400" rtl="0" eaLnBrk="1" latinLnBrk="0" hangingPunct="1">
         <a:defRPr sz="1800" kern="1200">
           <a:solidFill>
             <a:schemeClr val="tx1"/>
@@ -3063,7 +3305,7 @@
           <a:cs typeface="+mn-cs"/>
         </a:defRPr>
       </a:lvl8pPr>
-      <a:lvl9pPr marL="3657600" algn="l" defTabSz="457200" rtl="0" eaLnBrk="1" latinLnBrk="0" hangingPunct="1">
+      <a:lvl9pPr marL="3657600" algn="l" defTabSz="914400" rtl="0" eaLnBrk="1" latinLnBrk="0" hangingPunct="1">
         <a:defRPr sz="1800" kern="1200">
           <a:solidFill>
             <a:schemeClr val="tx1"/>
@@ -3088,9 +3330,41 @@
         <p:nvPr/>
       </p:nvGrpSpPr>
       <p:grpSpPr/>
+      <p:sp>
+        <p:nvSpPr>
+          <p:cNvPr id="2" name="TextBox 1"/>
+          <p:cNvSpPr txBox="1"/>
+          <p:nvPr/>
+        </p:nvSpPr>
+        <p:spPr>
+          <a:xfrm>
+            <a:off x="602681" y="5885078"/>
+            <a:ext cx="10986698" cy="523219"/>
+          </a:xfrm>
+          <a:prstGeom prst="rect">
+            <a:avLst/>
+          </a:prstGeom>
+          <a:noFill/>
+        </p:spPr>
+        <p:txBody>
+          <a:bodyPr wrap="square">
+            <a:spAutoFit/>
+          </a:bodyPr>
+          <a:lstStyle/>
+          <a:p>
+            <a:pPr algn="ctr">
+              <a:buNone/>
+            </a:pPr>
+            <a:r>
+              <a:rPr sz="2800"/>
+              <a:t>One of these is a symbol of scandal and clericalism.  The other is a hat.</a:t>
+            </a:r>
+          </a:p>
+        </p:txBody>
+      </p:sp>
       <p:pic>
         <p:nvPicPr>
-          <p:cNvPr id="2" name="Picture 1" descr="image1.png"/>
+          <p:cNvPr id="3" name="Picture 2" descr="image1.png"/>
           <p:cNvPicPr>
             <a:picLocks noChangeAspect="1"/>
           </p:cNvPicPr>
@@ -3104,53 +3378,14 @@
         </p:blipFill>
         <p:spPr>
           <a:xfrm>
-            <a:off x="0" y="436084"/>
-            <a:ext cx="12192000" cy="5449019"/>
+            <a:off x="0" y="436077"/>
+            <a:ext cx="12191969" cy="5449001"/>
           </a:xfrm>
           <a:prstGeom prst="rect">
             <a:avLst/>
           </a:prstGeom>
         </p:spPr>
       </p:pic>
-      <p:sp>
-        <p:nvSpPr>
-          <p:cNvPr id="3" name="Rectangle 2"/>
-          <p:cNvSpPr/>
-          <p:nvPr/>
-        </p:nvSpPr>
-        <p:spPr>
-          <a:xfrm>
-            <a:off x="602673" y="5885103"/>
-            <a:ext cx="10986654" cy="523220"/>
-          </a:xfrm>
-          <a:prstGeom prst="rect">
-            <a:avLst/>
-          </a:prstGeom>
-        </p:spPr>
-        <p:style>
-          <a:lnRef idx="1">
-            <a:schemeClr val="accent1"/>
-          </a:lnRef>
-          <a:fillRef idx="3">
-            <a:schemeClr val="accent1"/>
-          </a:fillRef>
-          <a:effectRef idx="2">
-            <a:schemeClr val="accent1"/>
-          </a:effectRef>
-          <a:fontRef idx="minor">
-            <a:schemeClr val="lt1"/>
-          </a:fontRef>
-        </p:style>
-        <p:txBody>
-          <a:bodyPr rtlCol="0" anchor="ctr"/>
-          <a:lstStyle/>
-          <a:p>
-            <a:r>
-              <a:t>One of these is a symbol of scandal and clericalism.  The other is a hat.</a:t>
-            </a:r>
-          </a:p>
-        </p:txBody>
-      </p:sp>
     </p:spTree>
   </p:cSld>
   <p:clrMapOvr>
@@ -3170,44 +3405,44 @@
         <a:sysClr val="window" lastClr="FFFFFF"/>
       </a:lt1>
       <a:dk2>
-        <a:srgbClr val="1F497D"/>
+        <a:srgbClr val="44546A"/>
       </a:dk2>
       <a:lt2>
-        <a:srgbClr val="EEECE1"/>
+        <a:srgbClr val="E7E6E6"/>
       </a:lt2>
       <a:accent1>
-        <a:srgbClr val="4F81BD"/>
+        <a:srgbClr val="4472C4"/>
       </a:accent1>
       <a:accent2>
-        <a:srgbClr val="C0504D"/>
+        <a:srgbClr val="ED7D31"/>
       </a:accent2>
       <a:accent3>
-        <a:srgbClr val="9BBB59"/>
+        <a:srgbClr val="A5A5A5"/>
       </a:accent3>
       <a:accent4>
-        <a:srgbClr val="8064A2"/>
+        <a:srgbClr val="FFC000"/>
       </a:accent4>
       <a:accent5>
-        <a:srgbClr val="4BACC6"/>
+        <a:srgbClr val="5B9BD5"/>
       </a:accent5>
       <a:accent6>
-        <a:srgbClr val="F79646"/>
+        <a:srgbClr val="70AD47"/>
       </a:accent6>
       <a:hlink>
-        <a:srgbClr val="0000FF"/>
+        <a:srgbClr val="0563C1"/>
       </a:hlink>
       <a:folHlink>
-        <a:srgbClr val="800080"/>
+        <a:srgbClr val="954F72"/>
       </a:folHlink>
     </a:clrScheme>
     <a:fontScheme name="Office">
       <a:majorFont>
-        <a:latin typeface="Calibri"/>
+        <a:latin typeface="Calibri Light" panose="020F0302020204030204"/>
         <a:ea typeface=""/>
         <a:cs typeface=""/>
-        <a:font script="Jpan" typeface="ＭＳ Ｐゴシック"/>
+        <a:font script="Jpan" typeface="游ゴシック Light"/>
         <a:font script="Hang" typeface="맑은 고딕"/>
-        <a:font script="Hans" typeface="宋体"/>
+        <a:font script="Hans" typeface="等线 Light"/>
         <a:font script="Hant" typeface="新細明體"/>
         <a:font script="Arab" typeface="Times New Roman"/>
         <a:font script="Hebr" typeface="Times New Roman"/>
@@ -3235,14 +3470,31 @@
         <a:font script="Viet" typeface="Times New Roman"/>
         <a:font script="Uigh" typeface="Microsoft Uighur"/>
         <a:font script="Geor" typeface="Sylfaen"/>
+        <a:font script="Armn" typeface="Arial"/>
+        <a:font script="Bugi" typeface="Leelawadee UI"/>
+        <a:font script="Bopo" typeface="Microsoft JhengHei"/>
+        <a:font script="Java" typeface="Javanese Text"/>
+        <a:font script="Lisu" typeface="Segoe UI"/>
+        <a:font script="Mymr" typeface="Myanmar Text"/>
+        <a:font script="Nkoo" typeface="Ebrima"/>
+        <a:font script="Olck" typeface="Nirmala UI"/>
+        <a:font script="Osma" typeface="Ebrima"/>
+        <a:font script="Phag" typeface="Phagspa"/>
+        <a:font script="Syrn" typeface="Estrangelo Edessa"/>
+        <a:font script="Syrj" typeface="Estrangelo Edessa"/>
+        <a:font script="Syre" typeface="Estrangelo Edessa"/>
+        <a:font script="Sora" typeface="Nirmala UI"/>
+        <a:font script="Tale" typeface="Microsoft Tai Le"/>
+        <a:font script="Talu" typeface="Microsoft New Tai Lue"/>
+        <a:font script="Tfng" typeface="Ebrima"/>
       </a:majorFont>
       <a:minorFont>
-        <a:latin typeface="Calibri"/>
+        <a:latin typeface="Calibri" panose="020F0502020204030204"/>
         <a:ea typeface=""/>
         <a:cs typeface=""/>
-        <a:font script="Jpan" typeface="ＭＳ Ｐゴシック"/>
+        <a:font script="Jpan" typeface="游ゴシック"/>
         <a:font script="Hang" typeface="맑은 고딕"/>
-        <a:font script="Hans" typeface="宋体"/>
+        <a:font script="Hans" typeface="等线"/>
         <a:font script="Hant" typeface="新細明體"/>
         <a:font script="Arab" typeface="Arial"/>
         <a:font script="Hebr" typeface="Arial"/>
@@ -3270,6 +3522,23 @@
         <a:font script="Viet" typeface="Arial"/>
         <a:font script="Uigh" typeface="Microsoft Uighur"/>
         <a:font script="Geor" typeface="Sylfaen"/>
+        <a:font script="Armn" typeface="Arial"/>
+        <a:font script="Bugi" typeface="Leelawadee UI"/>
+        <a:font script="Bopo" typeface="Microsoft JhengHei"/>
+        <a:font script="Java" typeface="Javanese Text"/>
+        <a:font script="Lisu" typeface="Segoe UI"/>
+        <a:font script="Mymr" typeface="Myanmar Text"/>
+        <a:font script="Nkoo" typeface="Ebrima"/>
+        <a:font script="Olck" typeface="Nirmala UI"/>
+        <a:font script="Osma" typeface="Ebrima"/>
+        <a:font script="Phag" typeface="Phagspa"/>
+        <a:font script="Syrn" typeface="Estrangelo Edessa"/>
+        <a:font script="Syrj" typeface="Estrangelo Edessa"/>
+        <a:font script="Syre" typeface="Estrangelo Edessa"/>
+        <a:font script="Sora" typeface="Nirmala UI"/>
+        <a:font script="Tale" typeface="Microsoft Tai Le"/>
+        <a:font script="Talu" typeface="Microsoft New Tai Lue"/>
+        <a:font script="Tfng" typeface="Ebrima"/>
       </a:minorFont>
     </a:fontScheme>
     <a:fmtScheme name="Office">
@@ -3281,200 +3550,141 @@
           <a:gsLst>
             <a:gs pos="0">
               <a:schemeClr val="phClr">
-                <a:tint val="50000"/>
-                <a:satMod val="300000"/>
+                <a:lumMod val="110000"/>
+                <a:satMod val="105000"/>
+                <a:tint val="67000"/>
               </a:schemeClr>
             </a:gs>
-            <a:gs pos="35000">
+            <a:gs pos="50000">
               <a:schemeClr val="phClr">
-                <a:tint val="37000"/>
-                <a:satMod val="300000"/>
+                <a:lumMod val="105000"/>
+                <a:satMod val="103000"/>
+                <a:tint val="73000"/>
               </a:schemeClr>
             </a:gs>
             <a:gs pos="100000">
               <a:schemeClr val="phClr">
-                <a:tint val="15000"/>
-                <a:satMod val="350000"/>
+                <a:lumMod val="105000"/>
+                <a:satMod val="109000"/>
+                <a:tint val="81000"/>
               </a:schemeClr>
             </a:gs>
           </a:gsLst>
-          <a:lin ang="16200000" scaled="1"/>
+          <a:lin ang="5400000" scaled="0"/>
         </a:gradFill>
         <a:gradFill rotWithShape="1">
           <a:gsLst>
             <a:gs pos="0">
               <a:schemeClr val="phClr">
-                <a:tint val="100000"/>
+                <a:satMod val="103000"/>
+                <a:lumMod val="102000"/>
+                <a:tint val="94000"/>
+              </a:schemeClr>
+            </a:gs>
+            <a:gs pos="50000">
+              <a:schemeClr val="phClr">
+                <a:satMod val="110000"/>
+                <a:lumMod val="100000"/>
                 <a:shade val="100000"/>
-                <a:satMod val="130000"/>
               </a:schemeClr>
             </a:gs>
             <a:gs pos="100000">
               <a:schemeClr val="phClr">
-                <a:tint val="50000"/>
-                <a:shade val="100000"/>
-                <a:satMod val="350000"/>
+                <a:lumMod val="99000"/>
+                <a:satMod val="120000"/>
+                <a:shade val="78000"/>
               </a:schemeClr>
             </a:gs>
           </a:gsLst>
-          <a:lin ang="16200000" scaled="0"/>
+          <a:lin ang="5400000" scaled="0"/>
         </a:gradFill>
       </a:fillStyleLst>
       <a:lnStyleLst>
-        <a:ln w="9525" cap="flat" cmpd="sng" algn="ctr">
-          <a:solidFill>
-            <a:schemeClr val="phClr">
-              <a:shade val="95000"/>
-              <a:satMod val="105000"/>
-            </a:schemeClr>
-          </a:solidFill>
-          <a:prstDash val="solid"/>
-        </a:ln>
-        <a:ln w="25400" cap="flat" cmpd="sng" algn="ctr">
+        <a:ln w="6350" cap="flat" cmpd="sng" algn="ctr">
           <a:solidFill>
             <a:schemeClr val="phClr"/>
           </a:solidFill>
           <a:prstDash val="solid"/>
+          <a:miter lim="800000"/>
         </a:ln>
-        <a:ln w="38100" cap="flat" cmpd="sng" algn="ctr">
+        <a:ln w="12700" cap="flat" cmpd="sng" algn="ctr">
           <a:solidFill>
             <a:schemeClr val="phClr"/>
           </a:solidFill>
           <a:prstDash val="solid"/>
+          <a:miter lim="800000"/>
+        </a:ln>
+        <a:ln w="19050" cap="flat" cmpd="sng" algn="ctr">
+          <a:solidFill>
+            <a:schemeClr val="phClr"/>
+          </a:solidFill>
+          <a:prstDash val="solid"/>
+          <a:miter lim="800000"/>
         </a:ln>
       </a:lnStyleLst>
       <a:effectStyleLst>
         <a:effectStyle>
+          <a:effectLst/>
+        </a:effectStyle>
+        <a:effectStyle>
+          <a:effectLst/>
+        </a:effectStyle>
+        <a:effectStyle>
           <a:effectLst>
-            <a:outerShdw blurRad="40000" dist="20000" dir="5400000" rotWithShape="0">
+            <a:outerShdw blurRad="57150" dist="19050" dir="5400000" algn="ctr" rotWithShape="0">
               <a:srgbClr val="000000">
-                <a:alpha val="38000"/>
+                <a:alpha val="63000"/>
               </a:srgbClr>
             </a:outerShdw>
           </a:effectLst>
-        </a:effectStyle>
-        <a:effectStyle>
-          <a:effectLst>
-            <a:outerShdw blurRad="40000" dist="23000" dir="5400000" rotWithShape="0">
-              <a:srgbClr val="000000">
-                <a:alpha val="35000"/>
-              </a:srgbClr>
-            </a:outerShdw>
-          </a:effectLst>
-        </a:effectStyle>
-        <a:effectStyle>
-          <a:effectLst>
-            <a:outerShdw blurRad="40000" dist="23000" dir="5400000" rotWithShape="0">
-              <a:srgbClr val="000000">
-                <a:alpha val="35000"/>
-              </a:srgbClr>
-            </a:outerShdw>
-          </a:effectLst>
-          <a:scene3d>
-            <a:camera prst="orthographicFront">
-              <a:rot lat="0" lon="0" rev="0"/>
-            </a:camera>
-            <a:lightRig rig="threePt" dir="t">
-              <a:rot lat="0" lon="0" rev="1200000"/>
-            </a:lightRig>
-          </a:scene3d>
-          <a:sp3d>
-            <a:bevelT w="63500" h="25400"/>
-          </a:sp3d>
         </a:effectStyle>
       </a:effectStyleLst>
       <a:bgFillStyleLst>
         <a:solidFill>
           <a:schemeClr val="phClr"/>
         </a:solidFill>
+        <a:solidFill>
+          <a:schemeClr val="phClr">
+            <a:tint val="95000"/>
+            <a:satMod val="170000"/>
+          </a:schemeClr>
+        </a:solidFill>
         <a:gradFill rotWithShape="1">
           <a:gsLst>
             <a:gs pos="0">
               <a:schemeClr val="phClr">
-                <a:tint val="40000"/>
-                <a:satMod val="350000"/>
+                <a:tint val="93000"/>
+                <a:satMod val="150000"/>
+                <a:shade val="98000"/>
+                <a:lumMod val="102000"/>
               </a:schemeClr>
             </a:gs>
-            <a:gs pos="40000">
+            <a:gs pos="50000">
               <a:schemeClr val="phClr">
-                <a:tint val="45000"/>
-                <a:shade val="99000"/>
-                <a:satMod val="350000"/>
+                <a:tint val="98000"/>
+                <a:satMod val="130000"/>
+                <a:shade val="90000"/>
+                <a:lumMod val="103000"/>
               </a:schemeClr>
             </a:gs>
             <a:gs pos="100000">
               <a:schemeClr val="phClr">
-                <a:shade val="20000"/>
-                <a:satMod val="255000"/>
+                <a:shade val="63000"/>
+                <a:satMod val="120000"/>
               </a:schemeClr>
             </a:gs>
           </a:gsLst>
-          <a:path path="circle">
-            <a:fillToRect l="50000" t="-80000" r="50000" b="180000"/>
-          </a:path>
-        </a:gradFill>
-        <a:gradFill rotWithShape="1">
-          <a:gsLst>
-            <a:gs pos="0">
-              <a:schemeClr val="phClr">
-                <a:tint val="80000"/>
-                <a:satMod val="300000"/>
-              </a:schemeClr>
-            </a:gs>
-            <a:gs pos="100000">
-              <a:schemeClr val="phClr">
-                <a:shade val="30000"/>
-                <a:satMod val="200000"/>
-              </a:schemeClr>
-            </a:gs>
-          </a:gsLst>
-          <a:path path="circle">
-            <a:fillToRect l="50000" t="50000" r="50000" b="50000"/>
-          </a:path>
+          <a:lin ang="5400000" scaled="0"/>
         </a:gradFill>
       </a:bgFillStyleLst>
     </a:fmtScheme>
   </a:themeElements>
-  <a:objectDefaults>
-    <a:spDef>
-      <a:spPr/>
-      <a:bodyPr/>
-      <a:lstStyle/>
-      <a:style>
-        <a:lnRef idx="1">
-          <a:schemeClr val="accent1"/>
-        </a:lnRef>
-        <a:fillRef idx="3">
-          <a:schemeClr val="accent1"/>
-        </a:fillRef>
-        <a:effectRef idx="2">
-          <a:schemeClr val="accent1"/>
-        </a:effectRef>
-        <a:fontRef idx="minor">
-          <a:schemeClr val="lt1"/>
-        </a:fontRef>
-      </a:style>
-    </a:spDef>
-    <a:lnDef>
-      <a:spPr/>
-      <a:bodyPr/>
-      <a:lstStyle/>
-      <a:style>
-        <a:lnRef idx="2">
-          <a:schemeClr val="accent1"/>
-        </a:lnRef>
-        <a:fillRef idx="0">
-          <a:schemeClr val="accent1"/>
-        </a:fillRef>
-        <a:effectRef idx="1">
-          <a:schemeClr val="accent1"/>
-        </a:effectRef>
-        <a:fontRef idx="minor">
-          <a:schemeClr val="tx1"/>
-        </a:fontRef>
-      </a:style>
-    </a:lnDef>
-  </a:objectDefaults>
+  <a:objectDefaults/>
   <a:extraClrSchemeLst/>
+  <a:extLst>
+    <a:ext uri="{05A4C25C-085E-4340-85A3-A5531E510DB2}">
+      <thm15:themeFamily xmlns:thm15="http://schemas.microsoft.com/office/thememl/2012/main" name="Office Theme" id="{62F939B6-93AF-4DB8-9C6B-D6C7DFDC589F}" vid="{4A3C46E8-61CC-4603-A589-7422A47A8E4A}"/>
+    </a:ext>
+  </a:extLst>
 </a:theme>
 </file>